--- a/ppt/RAG05-Retrieval.pptx
+++ b/ppt/RAG05-Retrieval.pptx
@@ -3672,7 +3672,7 @@
         </p:nvSpPr>
         <p:spPr>
           <a:xfrm>
-            <a:off x="1115616" y="5661248"/>
+            <a:off x="1371599" y="5572223"/>
             <a:ext cx="6400800" cy="551554"/>
           </a:xfrm>
         </p:spPr>
@@ -3728,10 +3728,9 @@
           <a:p>
             <a:pPr algn="ctr"/>
             <a:r>
-              <a:rPr lang="fr-FR" sz="3600" dirty="0" err="1"/>
-              <a:t>Embedding</a:t>
-            </a:r>
-            <a:endParaRPr lang="fr-FR" sz="3600" dirty="0"/>
+              <a:rPr lang="fr-FR" sz="3600" dirty="0"/>
+              <a:t>RAG</a:t>
+            </a:r>
           </a:p>
         </p:txBody>
       </p:sp>

--- a/ppt/RAG05-Retrieval.pptx
+++ b/ppt/RAG05-Retrieval.pptx
@@ -5,20 +5,21 @@
     <p:sldMasterId id="2147483653" r:id="rId1"/>
   </p:sldMasterIdLst>
   <p:notesMasterIdLst>
-    <p:notesMasterId r:id="rId10"/>
+    <p:notesMasterId r:id="rId11"/>
   </p:notesMasterIdLst>
   <p:handoutMasterIdLst>
-    <p:handoutMasterId r:id="rId11"/>
+    <p:handoutMasterId r:id="rId12"/>
   </p:handoutMasterIdLst>
   <p:sldIdLst>
     <p:sldId id="264" r:id="rId2"/>
     <p:sldId id="266" r:id="rId3"/>
     <p:sldId id="282" r:id="rId4"/>
     <p:sldId id="283" r:id="rId5"/>
-    <p:sldId id="285" r:id="rId6"/>
-    <p:sldId id="286" r:id="rId7"/>
-    <p:sldId id="287" r:id="rId8"/>
-    <p:sldId id="288" r:id="rId9"/>
+    <p:sldId id="289" r:id="rId6"/>
+    <p:sldId id="285" r:id="rId7"/>
+    <p:sldId id="286" r:id="rId8"/>
+    <p:sldId id="287" r:id="rId9"/>
+    <p:sldId id="288" r:id="rId10"/>
   </p:sldIdLst>
   <p:sldSz cx="9144000" cy="6858000" type="screen4x3"/>
   <p:notesSz cx="6648450" cy="9782175"/>
@@ -4196,6 +4197,133 @@
           <p:cNvPr id="2" name="Titre 1">
             <a:extLst>
               <a:ext uri="{FF2B5EF4-FFF2-40B4-BE49-F238E27FC236}">
+                <a16:creationId xmlns:a16="http://schemas.microsoft.com/office/drawing/2014/main" id="{0C9F7A1D-2A5D-7D9E-E291-8F22C715FCB3}"/>
+              </a:ext>
+            </a:extLst>
+          </p:cNvPr>
+          <p:cNvSpPr>
+            <a:spLocks noGrp="1"/>
+          </p:cNvSpPr>
+          <p:nvPr>
+            <p:ph type="title"/>
+          </p:nvPr>
+        </p:nvSpPr>
+        <p:spPr/>
+        <p:txBody>
+          <a:bodyPr/>
+          <a:lstStyle/>
+          <a:p>
+            <a:endParaRPr lang="fr-FR"/>
+          </a:p>
+        </p:txBody>
+      </p:sp>
+      <p:sp>
+        <p:nvSpPr>
+          <p:cNvPr id="3" name="Espace réservé du contenu 2">
+            <a:extLst>
+              <a:ext uri="{FF2B5EF4-FFF2-40B4-BE49-F238E27FC236}">
+                <a16:creationId xmlns:a16="http://schemas.microsoft.com/office/drawing/2014/main" id="{9C5A74C8-3A91-4851-F6C5-F9869F199151}"/>
+              </a:ext>
+            </a:extLst>
+          </p:cNvPr>
+          <p:cNvSpPr>
+            <a:spLocks noGrp="1"/>
+          </p:cNvSpPr>
+          <p:nvPr>
+            <p:ph idx="1"/>
+          </p:nvPr>
+        </p:nvSpPr>
+        <p:spPr/>
+        <p:txBody>
+          <a:bodyPr/>
+          <a:lstStyle/>
+          <a:p>
+            <a:endParaRPr lang="fr-FR"/>
+          </a:p>
+        </p:txBody>
+      </p:sp>
+      <p:pic>
+        <p:nvPicPr>
+          <p:cNvPr id="1026" name="Picture 2" descr="retrieval_diagram">
+            <a:extLst>
+              <a:ext uri="{FF2B5EF4-FFF2-40B4-BE49-F238E27FC236}">
+                <a16:creationId xmlns:a16="http://schemas.microsoft.com/office/drawing/2014/main" id="{6F697095-20DB-B2E2-FF98-8E4CA9C4BCC9}"/>
+              </a:ext>
+            </a:extLst>
+          </p:cNvPr>
+          <p:cNvPicPr>
+            <a:picLocks noChangeAspect="1" noChangeArrowheads="1"/>
+          </p:cNvPicPr>
+          <p:nvPr/>
+        </p:nvPicPr>
+        <p:blipFill>
+          <a:blip r:embed="rId2" cstate="print">
+            <a:extLst>
+              <a:ext uri="{28A0092B-C50C-407E-A947-70E740481C1C}">
+                <a14:useLocalDpi xmlns:a14="http://schemas.microsoft.com/office/drawing/2010/main" val="0"/>
+              </a:ext>
+            </a:extLst>
+          </a:blip>
+          <a:srcRect/>
+          <a:stretch>
+            <a:fillRect/>
+          </a:stretch>
+        </p:blipFill>
+        <p:spPr bwMode="auto">
+          <a:xfrm>
+            <a:off x="0" y="1082675"/>
+            <a:ext cx="9144000" cy="4691063"/>
+          </a:xfrm>
+          <a:prstGeom prst="rect">
+            <a:avLst/>
+          </a:prstGeom>
+          <a:noFill/>
+          <a:extLst>
+            <a:ext uri="{909E8E84-426E-40DD-AFC4-6F175D3DCCD1}">
+              <a14:hiddenFill xmlns:a14="http://schemas.microsoft.com/office/drawing/2010/main">
+                <a:solidFill>
+                  <a:srgbClr val="FFFFFF"/>
+                </a:solidFill>
+              </a14:hiddenFill>
+            </a:ext>
+          </a:extLst>
+        </p:spPr>
+      </p:pic>
+    </p:spTree>
+    <p:extLst>
+      <p:ext uri="{BB962C8B-B14F-4D97-AF65-F5344CB8AC3E}">
+        <p14:creationId xmlns:p14="http://schemas.microsoft.com/office/powerpoint/2010/main" val="1756472312"/>
+      </p:ext>
+    </p:extLst>
+  </p:cSld>
+  <p:clrMapOvr>
+    <a:masterClrMapping/>
+  </p:clrMapOvr>
+</p:sld>
+</file>
+
+<file path=ppt/slides/slide6.xml><?xml version="1.0" encoding="utf-8"?>
+<p:sld xmlns:a="http://schemas.openxmlformats.org/drawingml/2006/main" xmlns:r="http://schemas.openxmlformats.org/officeDocument/2006/relationships" xmlns:p="http://schemas.openxmlformats.org/presentationml/2006/main">
+  <p:cSld>
+    <p:spTree>
+      <p:nvGrpSpPr>
+        <p:cNvPr id="1" name=""/>
+        <p:cNvGrpSpPr/>
+        <p:nvPr/>
+      </p:nvGrpSpPr>
+      <p:grpSpPr>
+        <a:xfrm>
+          <a:off x="0" y="0"/>
+          <a:ext cx="0" cy="0"/>
+          <a:chOff x="0" y="0"/>
+          <a:chExt cx="0" cy="0"/>
+        </a:xfrm>
+      </p:grpSpPr>
+      <p:sp>
+        <p:nvSpPr>
+          <p:cNvPr id="2" name="Titre 1">
+            <a:extLst>
+              <a:ext uri="{FF2B5EF4-FFF2-40B4-BE49-F238E27FC236}">
                 <a16:creationId xmlns:a16="http://schemas.microsoft.com/office/drawing/2014/main" id="{50A45055-9DC2-9613-FA9F-8234BE282755}"/>
               </a:ext>
             </a:extLst>
@@ -4328,7 +4456,7 @@
 </p:sld>
 </file>
 
-<file path=ppt/slides/slide6.xml><?xml version="1.0" encoding="utf-8"?>
+<file path=ppt/slides/slide7.xml><?xml version="1.0" encoding="utf-8"?>
 <p:sld xmlns:a="http://schemas.openxmlformats.org/drawingml/2006/main" xmlns:r="http://schemas.openxmlformats.org/officeDocument/2006/relationships" xmlns:p="http://schemas.openxmlformats.org/presentationml/2006/main">
   <p:cSld>
     <p:spTree>
@@ -4463,7 +4591,7 @@
 </p:sld>
 </file>
 
-<file path=ppt/slides/slide7.xml><?xml version="1.0" encoding="utf-8"?>
+<file path=ppt/slides/slide8.xml><?xml version="1.0" encoding="utf-8"?>
 <p:sld xmlns:a="http://schemas.openxmlformats.org/drawingml/2006/main" xmlns:r="http://schemas.openxmlformats.org/officeDocument/2006/relationships" xmlns:p="http://schemas.openxmlformats.org/presentationml/2006/main">
   <p:cSld>
     <p:spTree>
@@ -4624,7 +4752,7 @@
 </p:sld>
 </file>
 
-<file path=ppt/slides/slide8.xml><?xml version="1.0" encoding="utf-8"?>
+<file path=ppt/slides/slide9.xml><?xml version="1.0" encoding="utf-8"?>
 <p:sld xmlns:a="http://schemas.openxmlformats.org/drawingml/2006/main" xmlns:r="http://schemas.openxmlformats.org/officeDocument/2006/relationships" xmlns:p="http://schemas.openxmlformats.org/presentationml/2006/main">
   <p:cSld>
     <p:spTree>

--- a/ppt/RAG05-Retrieval.pptx
+++ b/ppt/RAG05-Retrieval.pptx
@@ -5,21 +5,31 @@
     <p:sldMasterId id="2147483653" r:id="rId1"/>
   </p:sldMasterIdLst>
   <p:notesMasterIdLst>
-    <p:notesMasterId r:id="rId11"/>
+    <p:notesMasterId r:id="rId21"/>
   </p:notesMasterIdLst>
   <p:handoutMasterIdLst>
-    <p:handoutMasterId r:id="rId12"/>
+    <p:handoutMasterId r:id="rId22"/>
   </p:handoutMasterIdLst>
   <p:sldIdLst>
     <p:sldId id="264" r:id="rId2"/>
     <p:sldId id="266" r:id="rId3"/>
-    <p:sldId id="282" r:id="rId4"/>
-    <p:sldId id="283" r:id="rId5"/>
-    <p:sldId id="289" r:id="rId6"/>
-    <p:sldId id="285" r:id="rId7"/>
-    <p:sldId id="286" r:id="rId8"/>
-    <p:sldId id="287" r:id="rId9"/>
-    <p:sldId id="288" r:id="rId10"/>
+    <p:sldId id="290" r:id="rId4"/>
+    <p:sldId id="282" r:id="rId5"/>
+    <p:sldId id="265" r:id="rId6"/>
+    <p:sldId id="291" r:id="rId7"/>
+    <p:sldId id="267" r:id="rId8"/>
+    <p:sldId id="292" r:id="rId9"/>
+    <p:sldId id="293" r:id="rId10"/>
+    <p:sldId id="294" r:id="rId11"/>
+    <p:sldId id="295" r:id="rId12"/>
+    <p:sldId id="296" r:id="rId13"/>
+    <p:sldId id="283" r:id="rId14"/>
+    <p:sldId id="289" r:id="rId15"/>
+    <p:sldId id="285" r:id="rId16"/>
+    <p:sldId id="286" r:id="rId17"/>
+    <p:sldId id="287" r:id="rId18"/>
+    <p:sldId id="288" r:id="rId19"/>
+    <p:sldId id="297" r:id="rId20"/>
   </p:sldIdLst>
   <p:sldSz cx="9144000" cy="6858000" type="screen4x3"/>
   <p:notesSz cx="6648450" cy="9782175"/>
@@ -3773,6 +3783,1480 @@
 </p:sld>
 </file>
 
+<file path=ppt/slides/slide10.xml><?xml version="1.0" encoding="utf-8"?>
+<p:sld xmlns:a="http://schemas.openxmlformats.org/drawingml/2006/main" xmlns:r="http://schemas.openxmlformats.org/officeDocument/2006/relationships" xmlns:p="http://schemas.openxmlformats.org/presentationml/2006/main">
+  <p:cSld>
+    <p:spTree>
+      <p:nvGrpSpPr>
+        <p:cNvPr id="1" name=""/>
+        <p:cNvGrpSpPr/>
+        <p:nvPr/>
+      </p:nvGrpSpPr>
+      <p:grpSpPr>
+        <a:xfrm>
+          <a:off x="0" y="0"/>
+          <a:ext cx="0" cy="0"/>
+          <a:chOff x="0" y="0"/>
+          <a:chExt cx="0" cy="0"/>
+        </a:xfrm>
+      </p:grpSpPr>
+      <p:sp>
+        <p:nvSpPr>
+          <p:cNvPr id="2" name="Titre 1"/>
+          <p:cNvSpPr>
+            <a:spLocks noGrp="1"/>
+          </p:cNvSpPr>
+          <p:nvPr>
+            <p:ph type="title"/>
+          </p:nvPr>
+        </p:nvSpPr>
+        <p:spPr/>
+        <p:txBody>
+          <a:bodyPr/>
+          <a:lstStyle/>
+          <a:p>
+            <a:r>
+              <a:rPr lang="fr-FR" dirty="0"/>
+              <a:t>Problème détecté</a:t>
+            </a:r>
+          </a:p>
+        </p:txBody>
+      </p:sp>
+      <p:sp>
+        <p:nvSpPr>
+          <p:cNvPr id="3" name="Espace réservé du contenu 2"/>
+          <p:cNvSpPr>
+            <a:spLocks noGrp="1"/>
+          </p:cNvSpPr>
+          <p:nvPr>
+            <p:ph idx="1"/>
+          </p:nvPr>
+        </p:nvSpPr>
+        <p:spPr>
+          <a:xfrm>
+            <a:off x="179513" y="1412776"/>
+            <a:ext cx="5256584" cy="5040560"/>
+          </a:xfrm>
+        </p:spPr>
+        <p:txBody>
+          <a:bodyPr/>
+          <a:lstStyle/>
+          <a:p>
+            <a:r>
+              <a:rPr lang="fr-FR" dirty="0"/>
+              <a:t>Si k est trop faible nous obtenons</a:t>
+            </a:r>
+          </a:p>
+          <a:p>
+            <a:endParaRPr lang="fr-FR" dirty="0"/>
+          </a:p>
+          <a:p>
+            <a:endParaRPr lang="fr-FR" dirty="0"/>
+          </a:p>
+          <a:p>
+            <a:endParaRPr lang="fr-FR" dirty="0"/>
+          </a:p>
+          <a:p>
+            <a:r>
+              <a:rPr lang="fr-FR" dirty="0"/>
+              <a:t>Nous aurions préféré</a:t>
+            </a:r>
+          </a:p>
+          <a:p>
+            <a:pPr lvl="1"/>
+            <a:r>
+              <a:rPr lang="fr-FR" dirty="0"/>
+              <a:t>Pour cela nous sommes passé à k=5</a:t>
+            </a:r>
+          </a:p>
+          <a:p>
+            <a:endParaRPr lang="fr-FR" dirty="0"/>
+          </a:p>
+          <a:p>
+            <a:endParaRPr lang="fr-FR" dirty="0"/>
+          </a:p>
+        </p:txBody>
+      </p:sp>
+      <p:pic>
+        <p:nvPicPr>
+          <p:cNvPr id="1026" name="Picture 2" descr="Les zones désignées par les flèches ne vont pas être bien classées"/>
+          <p:cNvPicPr>
+            <a:picLocks noChangeAspect="1" noChangeArrowheads="1"/>
+          </p:cNvPicPr>
+          <p:nvPr/>
+        </p:nvPicPr>
+        <p:blipFill>
+          <a:blip r:embed="rId2">
+            <a:extLst>
+              <a:ext uri="{28A0092B-C50C-407E-A947-70E740481C1C}">
+                <a14:useLocalDpi xmlns:a14="http://schemas.microsoft.com/office/drawing/2010/main" val="0"/>
+              </a:ext>
+            </a:extLst>
+          </a:blip>
+          <a:srcRect/>
+          <a:stretch>
+            <a:fillRect/>
+          </a:stretch>
+        </p:blipFill>
+        <p:spPr bwMode="auto">
+          <a:xfrm>
+            <a:off x="5783593" y="1149225"/>
+            <a:ext cx="3233978" cy="2207767"/>
+          </a:xfrm>
+          <a:prstGeom prst="rect">
+            <a:avLst/>
+          </a:prstGeom>
+          <a:noFill/>
+          <a:extLst>
+            <a:ext uri="{909E8E84-426E-40DD-AFC4-6F175D3DCCD1}">
+              <a14:hiddenFill xmlns:a14="http://schemas.microsoft.com/office/drawing/2010/main">
+                <a:solidFill>
+                  <a:srgbClr val="FFFFFF"/>
+                </a:solidFill>
+              </a14:hiddenFill>
+            </a:ext>
+          </a:extLst>
+        </p:spPr>
+      </p:pic>
+      <p:pic>
+        <p:nvPicPr>
+          <p:cNvPr id="1028" name="Picture 4" descr="Classifieur 5-nn sur le même jeu de données, beaucoup plus efficace."/>
+          <p:cNvPicPr>
+            <a:picLocks noChangeAspect="1" noChangeArrowheads="1"/>
+          </p:cNvPicPr>
+          <p:nvPr/>
+        </p:nvPicPr>
+        <p:blipFill>
+          <a:blip r:embed="rId3">
+            <a:extLst>
+              <a:ext uri="{28A0092B-C50C-407E-A947-70E740481C1C}">
+                <a14:useLocalDpi xmlns:a14="http://schemas.microsoft.com/office/drawing/2010/main" val="0"/>
+              </a:ext>
+            </a:extLst>
+          </a:blip>
+          <a:srcRect/>
+          <a:stretch>
+            <a:fillRect/>
+          </a:stretch>
+        </p:blipFill>
+        <p:spPr bwMode="auto">
+          <a:xfrm>
+            <a:off x="5783593" y="3415634"/>
+            <a:ext cx="3156313" cy="2154747"/>
+          </a:xfrm>
+          <a:prstGeom prst="rect">
+            <a:avLst/>
+          </a:prstGeom>
+          <a:noFill/>
+          <a:extLst>
+            <a:ext uri="{909E8E84-426E-40DD-AFC4-6F175D3DCCD1}">
+              <a14:hiddenFill xmlns:a14="http://schemas.microsoft.com/office/drawing/2010/main">
+                <a:solidFill>
+                  <a:srgbClr val="FFFFFF"/>
+                </a:solidFill>
+              </a14:hiddenFill>
+            </a:ext>
+          </a:extLst>
+        </p:spPr>
+      </p:pic>
+    </p:spTree>
+    <p:extLst>
+      <p:ext uri="{BB962C8B-B14F-4D97-AF65-F5344CB8AC3E}">
+        <p14:creationId xmlns:p14="http://schemas.microsoft.com/office/powerpoint/2010/main" val="3051369363"/>
+      </p:ext>
+    </p:extLst>
+  </p:cSld>
+  <p:clrMapOvr>
+    <a:masterClrMapping/>
+  </p:clrMapOvr>
+</p:sld>
+</file>
+
+<file path=ppt/slides/slide11.xml><?xml version="1.0" encoding="utf-8"?>
+<p:sld xmlns:a="http://schemas.openxmlformats.org/drawingml/2006/main" xmlns:r="http://schemas.openxmlformats.org/officeDocument/2006/relationships" xmlns:p="http://schemas.openxmlformats.org/presentationml/2006/main">
+  <p:cSld>
+    <p:spTree>
+      <p:nvGrpSpPr>
+        <p:cNvPr id="1" name=""/>
+        <p:cNvGrpSpPr/>
+        <p:nvPr/>
+      </p:nvGrpSpPr>
+      <p:grpSpPr>
+        <a:xfrm>
+          <a:off x="0" y="0"/>
+          <a:ext cx="0" cy="0"/>
+          <a:chOff x="0" y="0"/>
+          <a:chExt cx="0" cy="0"/>
+        </a:xfrm>
+      </p:grpSpPr>
+      <p:sp>
+        <p:nvSpPr>
+          <p:cNvPr id="2" name="Titre 1"/>
+          <p:cNvSpPr>
+            <a:spLocks noGrp="1"/>
+          </p:cNvSpPr>
+          <p:nvPr>
+            <p:ph type="title"/>
+          </p:nvPr>
+        </p:nvSpPr>
+        <p:spPr/>
+        <p:txBody>
+          <a:bodyPr/>
+          <a:lstStyle/>
+          <a:p>
+            <a:r>
+              <a:rPr lang="fr-FR" dirty="0"/>
+              <a:t>Biais vs Variance</a:t>
+            </a:r>
+          </a:p>
+        </p:txBody>
+      </p:sp>
+      <p:sp>
+        <p:nvSpPr>
+          <p:cNvPr id="3" name="Espace réservé du contenu 2"/>
+          <p:cNvSpPr>
+            <a:spLocks noGrp="1"/>
+          </p:cNvSpPr>
+          <p:nvPr>
+            <p:ph idx="1"/>
+          </p:nvPr>
+        </p:nvSpPr>
+        <p:spPr>
+          <a:xfrm>
+            <a:off x="179513" y="1412776"/>
+            <a:ext cx="8838058" cy="5040560"/>
+          </a:xfrm>
+        </p:spPr>
+        <p:txBody>
+          <a:bodyPr/>
+          <a:lstStyle/>
+          <a:p>
+            <a:r>
+              <a:rPr lang="fr-FR" dirty="0"/>
+              <a:t>Avec k=5 notre modèle est plus indépendant du training set</a:t>
+            </a:r>
+          </a:p>
+          <a:p>
+            <a:pPr lvl="1"/>
+            <a:r>
+              <a:rPr lang="fr-FR" dirty="0"/>
+              <a:t>Nous avons augmenté la variance</a:t>
+            </a:r>
+          </a:p>
+          <a:p>
+            <a:pPr lvl="1"/>
+            <a:r>
+              <a:rPr lang="fr-FR" dirty="0"/>
+              <a:t>Cependant plus k est grand plus l’erreur sera grande</a:t>
+            </a:r>
+          </a:p>
+          <a:p>
+            <a:pPr lvl="1"/>
+            <a:r>
+              <a:rPr lang="fr-FR" dirty="0"/>
+              <a:t>Nous avons introduit un biais</a:t>
+            </a:r>
+          </a:p>
+          <a:p>
+            <a:r>
+              <a:rPr lang="fr-FR" dirty="0"/>
+              <a:t>Avec k=1 la variance sera plus faible, l’erreur également</a:t>
+            </a:r>
+          </a:p>
+          <a:p>
+            <a:r>
+              <a:rPr lang="fr-FR" dirty="0"/>
+              <a:t>Par exemple pour k=12 </a:t>
+            </a:r>
+          </a:p>
+          <a:p>
+            <a:pPr lvl="1"/>
+            <a:r>
+              <a:rPr lang="fr-FR" dirty="0"/>
+              <a:t>Le biais est énorme</a:t>
+            </a:r>
+          </a:p>
+          <a:p>
+            <a:endParaRPr lang="fr-FR" dirty="0"/>
+          </a:p>
+        </p:txBody>
+      </p:sp>
+      <p:pic>
+        <p:nvPicPr>
+          <p:cNvPr id="2050" name="Picture 2" descr="Parce qu'on a choisi un k trop grand, la zone de classification est trop lisse par rapport à la complexité du modèle"/>
+          <p:cNvPicPr>
+            <a:picLocks noChangeAspect="1" noChangeArrowheads="1"/>
+          </p:cNvPicPr>
+          <p:nvPr/>
+        </p:nvPicPr>
+        <p:blipFill>
+          <a:blip r:embed="rId2">
+            <a:extLst>
+              <a:ext uri="{28A0092B-C50C-407E-A947-70E740481C1C}">
+                <a14:useLocalDpi xmlns:a14="http://schemas.microsoft.com/office/drawing/2010/main" val="0"/>
+              </a:ext>
+            </a:extLst>
+          </a:blip>
+          <a:srcRect/>
+          <a:stretch>
+            <a:fillRect/>
+          </a:stretch>
+        </p:blipFill>
+        <p:spPr bwMode="auto">
+          <a:xfrm>
+            <a:off x="5148064" y="4149448"/>
+            <a:ext cx="3995936" cy="2743916"/>
+          </a:xfrm>
+          <a:prstGeom prst="rect">
+            <a:avLst/>
+          </a:prstGeom>
+          <a:noFill/>
+          <a:extLst>
+            <a:ext uri="{909E8E84-426E-40DD-AFC4-6F175D3DCCD1}">
+              <a14:hiddenFill xmlns:a14="http://schemas.microsoft.com/office/drawing/2010/main">
+                <a:solidFill>
+                  <a:srgbClr val="FFFFFF"/>
+                </a:solidFill>
+              </a14:hiddenFill>
+            </a:ext>
+          </a:extLst>
+        </p:spPr>
+      </p:pic>
+    </p:spTree>
+    <p:extLst>
+      <p:ext uri="{BB962C8B-B14F-4D97-AF65-F5344CB8AC3E}">
+        <p14:creationId xmlns:p14="http://schemas.microsoft.com/office/powerpoint/2010/main" val="3372267551"/>
+      </p:ext>
+    </p:extLst>
+  </p:cSld>
+  <p:clrMapOvr>
+    <a:masterClrMapping/>
+  </p:clrMapOvr>
+</p:sld>
+</file>
+
+<file path=ppt/slides/slide12.xml><?xml version="1.0" encoding="utf-8"?>
+<p:sld xmlns:a="http://schemas.openxmlformats.org/drawingml/2006/main" xmlns:r="http://schemas.openxmlformats.org/officeDocument/2006/relationships" xmlns:p="http://schemas.openxmlformats.org/presentationml/2006/main">
+  <p:cSld>
+    <p:spTree>
+      <p:nvGrpSpPr>
+        <p:cNvPr id="1" name=""/>
+        <p:cNvGrpSpPr/>
+        <p:nvPr/>
+      </p:nvGrpSpPr>
+      <p:grpSpPr>
+        <a:xfrm>
+          <a:off x="0" y="0"/>
+          <a:ext cx="0" cy="0"/>
+          <a:chOff x="0" y="0"/>
+          <a:chExt cx="0" cy="0"/>
+        </a:xfrm>
+      </p:grpSpPr>
+      <p:sp>
+        <p:nvSpPr>
+          <p:cNvPr id="2" name="Titre 1"/>
+          <p:cNvSpPr>
+            <a:spLocks noGrp="1"/>
+          </p:cNvSpPr>
+          <p:nvPr>
+            <p:ph type="title"/>
+          </p:nvPr>
+        </p:nvSpPr>
+        <p:spPr/>
+        <p:txBody>
+          <a:bodyPr/>
+          <a:lstStyle/>
+          <a:p>
+            <a:r>
+              <a:rPr lang="fr-FR" dirty="0"/>
+              <a:t>Décomposition </a:t>
+            </a:r>
+            <a:r>
+              <a:rPr lang="fr-FR"/>
+              <a:t>de l’erreur</a:t>
+            </a:r>
+            <a:endParaRPr lang="fr-FR" dirty="0"/>
+          </a:p>
+        </p:txBody>
+      </p:sp>
+      <p:sp>
+        <p:nvSpPr>
+          <p:cNvPr id="3" name="Espace réservé du contenu 2"/>
+          <p:cNvSpPr>
+            <a:spLocks noGrp="1"/>
+          </p:cNvSpPr>
+          <p:nvPr>
+            <p:ph idx="1"/>
+          </p:nvPr>
+        </p:nvSpPr>
+        <p:spPr/>
+        <p:txBody>
+          <a:bodyPr/>
+          <a:lstStyle/>
+          <a:p>
+            <a:r>
+              <a:rPr lang="fr-FR" dirty="0"/>
+              <a:t>L’erreur peut s’écrire</a:t>
+            </a:r>
+          </a:p>
+          <a:p>
+            <a:r>
+              <a:rPr lang="fr-FR" dirty="0" err="1"/>
+              <a:t>Err</a:t>
+            </a:r>
+            <a:r>
+              <a:rPr lang="fr-FR" dirty="0"/>
+              <a:t>(x</a:t>
+            </a:r>
+            <a:r>
+              <a:rPr lang="fr-FR"/>
+              <a:t>)=Biais²+Variance+Erreur </a:t>
+            </a:r>
+            <a:r>
+              <a:rPr lang="fr-FR" dirty="0"/>
+              <a:t>Irréductible</a:t>
+            </a:r>
+          </a:p>
+          <a:p>
+            <a:endParaRPr lang="fr-FR" dirty="0"/>
+          </a:p>
+        </p:txBody>
+      </p:sp>
+      <p:pic>
+        <p:nvPicPr>
+          <p:cNvPr id="3074" name="Picture 2" descr="On cherche à se placer au minimum de l'erreur totale"/>
+          <p:cNvPicPr>
+            <a:picLocks noChangeAspect="1" noChangeArrowheads="1"/>
+          </p:cNvPicPr>
+          <p:nvPr/>
+        </p:nvPicPr>
+        <p:blipFill>
+          <a:blip r:embed="rId2">
+            <a:extLst>
+              <a:ext uri="{28A0092B-C50C-407E-A947-70E740481C1C}">
+                <a14:useLocalDpi xmlns:a14="http://schemas.microsoft.com/office/drawing/2010/main" val="0"/>
+              </a:ext>
+            </a:extLst>
+          </a:blip>
+          <a:srcRect/>
+          <a:stretch>
+            <a:fillRect/>
+          </a:stretch>
+        </p:blipFill>
+        <p:spPr bwMode="auto">
+          <a:xfrm>
+            <a:off x="1331640" y="2780928"/>
+            <a:ext cx="5256584" cy="3301391"/>
+          </a:xfrm>
+          <a:prstGeom prst="rect">
+            <a:avLst/>
+          </a:prstGeom>
+          <a:noFill/>
+          <a:extLst>
+            <a:ext uri="{909E8E84-426E-40DD-AFC4-6F175D3DCCD1}">
+              <a14:hiddenFill xmlns:a14="http://schemas.microsoft.com/office/drawing/2010/main">
+                <a:solidFill>
+                  <a:srgbClr val="FFFFFF"/>
+                </a:solidFill>
+              </a14:hiddenFill>
+            </a:ext>
+          </a:extLst>
+        </p:spPr>
+      </p:pic>
+    </p:spTree>
+    <p:extLst>
+      <p:ext uri="{BB962C8B-B14F-4D97-AF65-F5344CB8AC3E}">
+        <p14:creationId xmlns:p14="http://schemas.microsoft.com/office/powerpoint/2010/main" val="2380443556"/>
+      </p:ext>
+    </p:extLst>
+  </p:cSld>
+  <p:clrMapOvr>
+    <a:masterClrMapping/>
+  </p:clrMapOvr>
+</p:sld>
+</file>
+
+<file path=ppt/slides/slide13.xml><?xml version="1.0" encoding="utf-8"?>
+<p:sld xmlns:a="http://schemas.openxmlformats.org/drawingml/2006/main" xmlns:r="http://schemas.openxmlformats.org/officeDocument/2006/relationships" xmlns:p="http://schemas.openxmlformats.org/presentationml/2006/main">
+  <p:cSld>
+    <p:spTree>
+      <p:nvGrpSpPr>
+        <p:cNvPr id="1" name=""/>
+        <p:cNvGrpSpPr/>
+        <p:nvPr/>
+      </p:nvGrpSpPr>
+      <p:grpSpPr>
+        <a:xfrm>
+          <a:off x="0" y="0"/>
+          <a:ext cx="0" cy="0"/>
+          <a:chOff x="0" y="0"/>
+          <a:chExt cx="0" cy="0"/>
+        </a:xfrm>
+      </p:grpSpPr>
+      <p:sp>
+        <p:nvSpPr>
+          <p:cNvPr id="2" name="Titre 1">
+            <a:extLst>
+              <a:ext uri="{FF2B5EF4-FFF2-40B4-BE49-F238E27FC236}">
+                <a16:creationId xmlns:a16="http://schemas.microsoft.com/office/drawing/2014/main" id="{A6A88D71-EB7F-3E7C-C95B-3917194CFDBE}"/>
+              </a:ext>
+            </a:extLst>
+          </p:cNvPr>
+          <p:cNvSpPr>
+            <a:spLocks noGrp="1"/>
+          </p:cNvSpPr>
+          <p:nvPr>
+            <p:ph type="title"/>
+          </p:nvPr>
+        </p:nvSpPr>
+        <p:spPr/>
+        <p:txBody>
+          <a:bodyPr/>
+          <a:lstStyle/>
+          <a:p>
+            <a:r>
+              <a:rPr lang="fr-FR" dirty="0" err="1"/>
+              <a:t>Retrieval</a:t>
+            </a:r>
+            <a:endParaRPr lang="fr-FR" dirty="0"/>
+          </a:p>
+        </p:txBody>
+      </p:sp>
+      <p:sp>
+        <p:nvSpPr>
+          <p:cNvPr id="3" name="Espace réservé du contenu 2">
+            <a:extLst>
+              <a:ext uri="{FF2B5EF4-FFF2-40B4-BE49-F238E27FC236}">
+                <a16:creationId xmlns:a16="http://schemas.microsoft.com/office/drawing/2014/main" id="{00027C64-0046-5A20-A35B-071B14E621B0}"/>
+              </a:ext>
+            </a:extLst>
+          </p:cNvPr>
+          <p:cNvSpPr>
+            <a:spLocks noGrp="1"/>
+          </p:cNvSpPr>
+          <p:nvPr>
+            <p:ph idx="1"/>
+          </p:nvPr>
+        </p:nvSpPr>
+        <p:spPr/>
+        <p:txBody>
+          <a:bodyPr/>
+          <a:lstStyle/>
+          <a:p>
+            <a:r>
+              <a:rPr lang="fr-FR" dirty="0"/>
+              <a:t>Le </a:t>
+            </a:r>
+            <a:r>
+              <a:rPr lang="fr-FR" dirty="0" err="1"/>
+              <a:t>retrieval</a:t>
+            </a:r>
+            <a:r>
+              <a:rPr lang="fr-FR" dirty="0"/>
+              <a:t> consiste à parcourir la BD de vecteurs pour trouver les vecteurs les plus proche du prompt</a:t>
+            </a:r>
+          </a:p>
+          <a:p>
+            <a:pPr lvl="1"/>
+            <a:r>
+              <a:rPr lang="fr-FR" dirty="0"/>
+              <a:t>Modèle </a:t>
+            </a:r>
+            <a:r>
+              <a:rPr lang="fr-FR" dirty="0" err="1"/>
+              <a:t>kNN</a:t>
+            </a:r>
+            <a:r>
+              <a:rPr lang="fr-FR" dirty="0"/>
+              <a:t> : k </a:t>
+            </a:r>
+            <a:r>
+              <a:rPr lang="fr-FR" dirty="0" err="1"/>
+              <a:t>Nearest</a:t>
+            </a:r>
+            <a:r>
+              <a:rPr lang="fr-FR" dirty="0"/>
+              <a:t> Neighbors</a:t>
+            </a:r>
+          </a:p>
+          <a:p>
+            <a:pPr lvl="1"/>
+            <a:r>
+              <a:rPr lang="fr-FR" dirty="0"/>
+              <a:t>Framework </a:t>
+            </a:r>
+            <a:r>
+              <a:rPr lang="fr-FR" dirty="0" err="1"/>
+              <a:t>Scikit-learn</a:t>
+            </a:r>
+            <a:r>
+              <a:rPr lang="fr-FR" dirty="0"/>
+              <a:t> ou </a:t>
+            </a:r>
+            <a:r>
+              <a:rPr lang="fr-FR" dirty="0" err="1"/>
+              <a:t>np.vstack</a:t>
+            </a:r>
+            <a:endParaRPr lang="fr-FR" dirty="0"/>
+          </a:p>
+          <a:p>
+            <a:pPr lvl="1"/>
+            <a:r>
+              <a:rPr lang="fr-FR" dirty="0"/>
+              <a:t>Nécessite d'être rapide</a:t>
+            </a:r>
+          </a:p>
+          <a:p>
+            <a:pPr lvl="1"/>
+            <a:r>
+              <a:rPr lang="fr-FR" dirty="0"/>
+              <a:t>GPU recommandé</a:t>
+            </a:r>
+          </a:p>
+          <a:p>
+            <a:pPr lvl="1"/>
+            <a:r>
+              <a:rPr lang="fr-FR" dirty="0"/>
+              <a:t>k varie de 1 à quelques dizaines</a:t>
+            </a:r>
+          </a:p>
+          <a:p>
+            <a:r>
+              <a:rPr lang="fr-FR" dirty="0"/>
+              <a:t>Le </a:t>
+            </a:r>
+            <a:r>
+              <a:rPr lang="fr-FR"/>
+              <a:t>Retrieval</a:t>
+            </a:r>
+            <a:r>
+              <a:rPr lang="fr-FR" dirty="0"/>
+              <a:t> retourne donc une liste de vecteurs triés avec les scores</a:t>
+            </a:r>
+          </a:p>
+        </p:txBody>
+      </p:sp>
+    </p:spTree>
+    <p:extLst>
+      <p:ext uri="{BB962C8B-B14F-4D97-AF65-F5344CB8AC3E}">
+        <p14:creationId xmlns:p14="http://schemas.microsoft.com/office/powerpoint/2010/main" val="4246885626"/>
+      </p:ext>
+    </p:extLst>
+  </p:cSld>
+  <p:clrMapOvr>
+    <a:masterClrMapping/>
+  </p:clrMapOvr>
+</p:sld>
+</file>
+
+<file path=ppt/slides/slide14.xml><?xml version="1.0" encoding="utf-8"?>
+<p:sld xmlns:a="http://schemas.openxmlformats.org/drawingml/2006/main" xmlns:r="http://schemas.openxmlformats.org/officeDocument/2006/relationships" xmlns:p="http://schemas.openxmlformats.org/presentationml/2006/main">
+  <p:cSld>
+    <p:spTree>
+      <p:nvGrpSpPr>
+        <p:cNvPr id="1" name=""/>
+        <p:cNvGrpSpPr/>
+        <p:nvPr/>
+      </p:nvGrpSpPr>
+      <p:grpSpPr>
+        <a:xfrm>
+          <a:off x="0" y="0"/>
+          <a:ext cx="0" cy="0"/>
+          <a:chOff x="0" y="0"/>
+          <a:chExt cx="0" cy="0"/>
+        </a:xfrm>
+      </p:grpSpPr>
+      <p:sp>
+        <p:nvSpPr>
+          <p:cNvPr id="2" name="Titre 1">
+            <a:extLst>
+              <a:ext uri="{FF2B5EF4-FFF2-40B4-BE49-F238E27FC236}">
+                <a16:creationId xmlns:a16="http://schemas.microsoft.com/office/drawing/2014/main" id="{0C9F7A1D-2A5D-7D9E-E291-8F22C715FCB3}"/>
+              </a:ext>
+            </a:extLst>
+          </p:cNvPr>
+          <p:cNvSpPr>
+            <a:spLocks noGrp="1"/>
+          </p:cNvSpPr>
+          <p:nvPr>
+            <p:ph type="title"/>
+          </p:nvPr>
+        </p:nvSpPr>
+        <p:spPr/>
+        <p:txBody>
+          <a:bodyPr/>
+          <a:lstStyle/>
+          <a:p>
+            <a:endParaRPr lang="fr-FR"/>
+          </a:p>
+        </p:txBody>
+      </p:sp>
+      <p:sp>
+        <p:nvSpPr>
+          <p:cNvPr id="3" name="Espace réservé du contenu 2">
+            <a:extLst>
+              <a:ext uri="{FF2B5EF4-FFF2-40B4-BE49-F238E27FC236}">
+                <a16:creationId xmlns:a16="http://schemas.microsoft.com/office/drawing/2014/main" id="{9C5A74C8-3A91-4851-F6C5-F9869F199151}"/>
+              </a:ext>
+            </a:extLst>
+          </p:cNvPr>
+          <p:cNvSpPr>
+            <a:spLocks noGrp="1"/>
+          </p:cNvSpPr>
+          <p:nvPr>
+            <p:ph idx="1"/>
+          </p:nvPr>
+        </p:nvSpPr>
+        <p:spPr/>
+        <p:txBody>
+          <a:bodyPr/>
+          <a:lstStyle/>
+          <a:p>
+            <a:endParaRPr lang="fr-FR"/>
+          </a:p>
+        </p:txBody>
+      </p:sp>
+      <p:pic>
+        <p:nvPicPr>
+          <p:cNvPr id="1026" name="Picture 2" descr="retrieval_diagram">
+            <a:extLst>
+              <a:ext uri="{FF2B5EF4-FFF2-40B4-BE49-F238E27FC236}">
+                <a16:creationId xmlns:a16="http://schemas.microsoft.com/office/drawing/2014/main" id="{6F697095-20DB-B2E2-FF98-8E4CA9C4BCC9}"/>
+              </a:ext>
+            </a:extLst>
+          </p:cNvPr>
+          <p:cNvPicPr>
+            <a:picLocks noChangeAspect="1" noChangeArrowheads="1"/>
+          </p:cNvPicPr>
+          <p:nvPr/>
+        </p:nvPicPr>
+        <p:blipFill>
+          <a:blip r:embed="rId2" cstate="print">
+            <a:extLst>
+              <a:ext uri="{28A0092B-C50C-407E-A947-70E740481C1C}">
+                <a14:useLocalDpi xmlns:a14="http://schemas.microsoft.com/office/drawing/2010/main" val="0"/>
+              </a:ext>
+            </a:extLst>
+          </a:blip>
+          <a:srcRect/>
+          <a:stretch>
+            <a:fillRect/>
+          </a:stretch>
+        </p:blipFill>
+        <p:spPr bwMode="auto">
+          <a:xfrm>
+            <a:off x="0" y="1082675"/>
+            <a:ext cx="9144000" cy="4691063"/>
+          </a:xfrm>
+          <a:prstGeom prst="rect">
+            <a:avLst/>
+          </a:prstGeom>
+          <a:noFill/>
+          <a:extLst>
+            <a:ext uri="{909E8E84-426E-40DD-AFC4-6F175D3DCCD1}">
+              <a14:hiddenFill xmlns:a14="http://schemas.microsoft.com/office/drawing/2010/main">
+                <a:solidFill>
+                  <a:srgbClr val="FFFFFF"/>
+                </a:solidFill>
+              </a14:hiddenFill>
+            </a:ext>
+          </a:extLst>
+        </p:spPr>
+      </p:pic>
+    </p:spTree>
+    <p:extLst>
+      <p:ext uri="{BB962C8B-B14F-4D97-AF65-F5344CB8AC3E}">
+        <p14:creationId xmlns:p14="http://schemas.microsoft.com/office/powerpoint/2010/main" val="1756472312"/>
+      </p:ext>
+    </p:extLst>
+  </p:cSld>
+  <p:clrMapOvr>
+    <a:masterClrMapping/>
+  </p:clrMapOvr>
+</p:sld>
+</file>
+
+<file path=ppt/slides/slide15.xml><?xml version="1.0" encoding="utf-8"?>
+<p:sld xmlns:a="http://schemas.openxmlformats.org/drawingml/2006/main" xmlns:r="http://schemas.openxmlformats.org/officeDocument/2006/relationships" xmlns:p="http://schemas.openxmlformats.org/presentationml/2006/main">
+  <p:cSld>
+    <p:spTree>
+      <p:nvGrpSpPr>
+        <p:cNvPr id="1" name=""/>
+        <p:cNvGrpSpPr/>
+        <p:nvPr/>
+      </p:nvGrpSpPr>
+      <p:grpSpPr>
+        <a:xfrm>
+          <a:off x="0" y="0"/>
+          <a:ext cx="0" cy="0"/>
+          <a:chOff x="0" y="0"/>
+          <a:chExt cx="0" cy="0"/>
+        </a:xfrm>
+      </p:grpSpPr>
+      <p:sp>
+        <p:nvSpPr>
+          <p:cNvPr id="2" name="Titre 1">
+            <a:extLst>
+              <a:ext uri="{FF2B5EF4-FFF2-40B4-BE49-F238E27FC236}">
+                <a16:creationId xmlns:a16="http://schemas.microsoft.com/office/drawing/2014/main" id="{50A45055-9DC2-9613-FA9F-8234BE282755}"/>
+              </a:ext>
+            </a:extLst>
+          </p:cNvPr>
+          <p:cNvSpPr>
+            <a:spLocks noGrp="1"/>
+          </p:cNvSpPr>
+          <p:nvPr>
+            <p:ph type="title"/>
+          </p:nvPr>
+        </p:nvSpPr>
+        <p:spPr/>
+        <p:txBody>
+          <a:bodyPr/>
+          <a:lstStyle/>
+          <a:p>
+            <a:r>
+              <a:rPr lang="fr-FR" dirty="0"/>
+              <a:t>Scores</a:t>
+            </a:r>
+          </a:p>
+        </p:txBody>
+      </p:sp>
+      <p:sp>
+        <p:nvSpPr>
+          <p:cNvPr id="3" name="Espace réservé du contenu 2">
+            <a:extLst>
+              <a:ext uri="{FF2B5EF4-FFF2-40B4-BE49-F238E27FC236}">
+                <a16:creationId xmlns:a16="http://schemas.microsoft.com/office/drawing/2014/main" id="{5BF520CE-9D9F-1351-0554-264AB6E8BF6F}"/>
+              </a:ext>
+            </a:extLst>
+          </p:cNvPr>
+          <p:cNvSpPr>
+            <a:spLocks noGrp="1"/>
+          </p:cNvSpPr>
+          <p:nvPr>
+            <p:ph idx="1"/>
+          </p:nvPr>
+        </p:nvSpPr>
+        <p:spPr/>
+        <p:txBody>
+          <a:bodyPr/>
+          <a:lstStyle/>
+          <a:p>
+            <a:r>
+              <a:rPr lang="fr-FR" dirty="0"/>
+              <a:t>Les meilleurs vecteurs sont retournés</a:t>
+            </a:r>
+          </a:p>
+          <a:p>
+            <a:pPr lvl="1"/>
+            <a:r>
+              <a:rPr lang="fr-FR" dirty="0"/>
+              <a:t>Triés par score</a:t>
+            </a:r>
+          </a:p>
+          <a:p>
+            <a:pPr lvl="1"/>
+            <a:r>
+              <a:rPr lang="en-US" dirty="0" err="1"/>
+              <a:t>cosine_similarity</a:t>
+            </a:r>
+            <a:r>
+              <a:rPr lang="en-US" dirty="0"/>
+              <a:t>(</a:t>
+            </a:r>
+            <a:r>
+              <a:rPr lang="en-US" dirty="0" err="1"/>
+              <a:t>query_embedding</a:t>
+            </a:r>
+            <a:r>
+              <a:rPr lang="en-US" dirty="0"/>
+              <a:t>, </a:t>
+            </a:r>
+            <a:r>
+              <a:rPr lang="en-US" dirty="0" err="1"/>
+              <a:t>np.vstack</a:t>
+            </a:r>
+            <a:r>
+              <a:rPr lang="en-US" dirty="0"/>
+              <a:t>(embeddings))</a:t>
+            </a:r>
+            <a:endParaRPr lang="fr-FR" dirty="0"/>
+          </a:p>
+          <a:p>
+            <a:pPr lvl="1"/>
+            <a:r>
+              <a:rPr lang="fr-FR" dirty="0"/>
+              <a:t>Très rapide</a:t>
+            </a:r>
+          </a:p>
+          <a:p>
+            <a:r>
+              <a:rPr lang="fr-FR" dirty="0"/>
+              <a:t>Gestion de la précision de la réponse</a:t>
+            </a:r>
+          </a:p>
+          <a:p>
+            <a:r>
+              <a:rPr lang="fr-FR" dirty="0"/>
+              <a:t>Meilleure gestion des hallucinations</a:t>
+            </a:r>
+          </a:p>
+          <a:p>
+            <a:pPr lvl="1"/>
+            <a:r>
+              <a:rPr lang="fr-FR" dirty="0"/>
+              <a:t>Si le meilleurs score est trop faible</a:t>
+            </a:r>
+          </a:p>
+          <a:p>
+            <a:pPr lvl="1"/>
+            <a:r>
+              <a:rPr lang="fr-FR" dirty="0"/>
+              <a:t>Je ne sais pas !</a:t>
+            </a:r>
+          </a:p>
+        </p:txBody>
+      </p:sp>
+    </p:spTree>
+    <p:extLst>
+      <p:ext uri="{BB962C8B-B14F-4D97-AF65-F5344CB8AC3E}">
+        <p14:creationId xmlns:p14="http://schemas.microsoft.com/office/powerpoint/2010/main" val="3479072851"/>
+      </p:ext>
+    </p:extLst>
+  </p:cSld>
+  <p:clrMapOvr>
+    <a:masterClrMapping/>
+  </p:clrMapOvr>
+</p:sld>
+</file>
+
+<file path=ppt/slides/slide16.xml><?xml version="1.0" encoding="utf-8"?>
+<p:sld xmlns:a="http://schemas.openxmlformats.org/drawingml/2006/main" xmlns:r="http://schemas.openxmlformats.org/officeDocument/2006/relationships" xmlns:p="http://schemas.openxmlformats.org/presentationml/2006/main">
+  <p:cSld>
+    <p:spTree>
+      <p:nvGrpSpPr>
+        <p:cNvPr id="1" name=""/>
+        <p:cNvGrpSpPr/>
+        <p:nvPr/>
+      </p:nvGrpSpPr>
+      <p:grpSpPr>
+        <a:xfrm>
+          <a:off x="0" y="0"/>
+          <a:ext cx="0" cy="0"/>
+          <a:chOff x="0" y="0"/>
+          <a:chExt cx="0" cy="0"/>
+        </a:xfrm>
+      </p:grpSpPr>
+      <p:sp>
+        <p:nvSpPr>
+          <p:cNvPr id="2" name="Titre 1">
+            <a:extLst>
+              <a:ext uri="{FF2B5EF4-FFF2-40B4-BE49-F238E27FC236}">
+                <a16:creationId xmlns:a16="http://schemas.microsoft.com/office/drawing/2014/main" id="{EF6C4528-6434-5246-DFDF-4078515CC9B3}"/>
+              </a:ext>
+            </a:extLst>
+          </p:cNvPr>
+          <p:cNvSpPr>
+            <a:spLocks noGrp="1"/>
+          </p:cNvSpPr>
+          <p:nvPr>
+            <p:ph type="title"/>
+          </p:nvPr>
+        </p:nvSpPr>
+        <p:spPr/>
+        <p:txBody>
+          <a:bodyPr/>
+          <a:lstStyle/>
+          <a:p>
+            <a:r>
+              <a:rPr lang="fr-FR" dirty="0" err="1"/>
+              <a:t>Retrieval</a:t>
+            </a:r>
+            <a:r>
+              <a:rPr lang="fr-FR" dirty="0"/>
+              <a:t> léger</a:t>
+            </a:r>
+          </a:p>
+        </p:txBody>
+      </p:sp>
+      <p:sp>
+        <p:nvSpPr>
+          <p:cNvPr id="3" name="Espace réservé du contenu 2">
+            <a:extLst>
+              <a:ext uri="{FF2B5EF4-FFF2-40B4-BE49-F238E27FC236}">
+                <a16:creationId xmlns:a16="http://schemas.microsoft.com/office/drawing/2014/main" id="{AFA9C0E3-7DD2-4637-5C63-6E31DD6E50E9}"/>
+              </a:ext>
+            </a:extLst>
+          </p:cNvPr>
+          <p:cNvSpPr>
+            <a:spLocks noGrp="1"/>
+          </p:cNvSpPr>
+          <p:nvPr>
+            <p:ph idx="1"/>
+          </p:nvPr>
+        </p:nvSpPr>
+        <p:spPr/>
+        <p:txBody>
+          <a:bodyPr/>
+          <a:lstStyle/>
+          <a:p>
+            <a:r>
+              <a:rPr lang="fr-FR" dirty="0"/>
+              <a:t>Récupération des </a:t>
+            </a:r>
+            <a:r>
+              <a:rPr lang="fr-FR" dirty="0" err="1"/>
+              <a:t>métadata</a:t>
+            </a:r>
+            <a:endParaRPr lang="fr-FR" dirty="0"/>
+          </a:p>
+          <a:p>
+            <a:pPr lvl="1"/>
+            <a:r>
+              <a:rPr lang="fr-FR" dirty="0"/>
+              <a:t>Récupération du </a:t>
+            </a:r>
+            <a:r>
+              <a:rPr lang="fr-FR" dirty="0" err="1"/>
+              <a:t>chunk</a:t>
+            </a:r>
+            <a:endParaRPr lang="fr-FR" dirty="0"/>
+          </a:p>
+          <a:p>
+            <a:pPr lvl="1"/>
+            <a:r>
+              <a:rPr lang="fr-FR" dirty="0"/>
+              <a:t>Pas de LLM</a:t>
+            </a:r>
+          </a:p>
+          <a:p>
+            <a:r>
+              <a:rPr lang="fr-FR" dirty="0"/>
+              <a:t>Cas d'utilisation</a:t>
+            </a:r>
+          </a:p>
+          <a:p>
+            <a:pPr lvl="1"/>
+            <a:r>
+              <a:rPr lang="fr-FR" dirty="0" err="1"/>
+              <a:t>Chatbot</a:t>
+            </a:r>
+            <a:endParaRPr lang="fr-FR" dirty="0"/>
+          </a:p>
+          <a:p>
+            <a:pPr lvl="1"/>
+            <a:r>
+              <a:rPr lang="fr-FR" dirty="0"/>
+              <a:t>Moteur de recherche</a:t>
+            </a:r>
+          </a:p>
+        </p:txBody>
+      </p:sp>
+    </p:spTree>
+    <p:extLst>
+      <p:ext uri="{BB962C8B-B14F-4D97-AF65-F5344CB8AC3E}">
+        <p14:creationId xmlns:p14="http://schemas.microsoft.com/office/powerpoint/2010/main" val="1345439641"/>
+      </p:ext>
+    </p:extLst>
+  </p:cSld>
+  <p:clrMapOvr>
+    <a:masterClrMapping/>
+  </p:clrMapOvr>
+</p:sld>
+</file>
+
+<file path=ppt/slides/slide17.xml><?xml version="1.0" encoding="utf-8"?>
+<p:sld xmlns:a="http://schemas.openxmlformats.org/drawingml/2006/main" xmlns:r="http://schemas.openxmlformats.org/officeDocument/2006/relationships" xmlns:p="http://schemas.openxmlformats.org/presentationml/2006/main">
+  <p:cSld>
+    <p:spTree>
+      <p:nvGrpSpPr>
+        <p:cNvPr id="1" name=""/>
+        <p:cNvGrpSpPr/>
+        <p:nvPr/>
+      </p:nvGrpSpPr>
+      <p:grpSpPr>
+        <a:xfrm>
+          <a:off x="0" y="0"/>
+          <a:ext cx="0" cy="0"/>
+          <a:chOff x="0" y="0"/>
+          <a:chExt cx="0" cy="0"/>
+        </a:xfrm>
+      </p:grpSpPr>
+      <p:sp>
+        <p:nvSpPr>
+          <p:cNvPr id="2" name="Titre 1">
+            <a:extLst>
+              <a:ext uri="{FF2B5EF4-FFF2-40B4-BE49-F238E27FC236}">
+                <a16:creationId xmlns:a16="http://schemas.microsoft.com/office/drawing/2014/main" id="{1C9C2F40-ACAB-B971-D53F-3C1202E61AA7}"/>
+              </a:ext>
+            </a:extLst>
+          </p:cNvPr>
+          <p:cNvSpPr>
+            <a:spLocks noGrp="1"/>
+          </p:cNvSpPr>
+          <p:nvPr>
+            <p:ph type="title"/>
+          </p:nvPr>
+        </p:nvSpPr>
+        <p:spPr/>
+        <p:txBody>
+          <a:bodyPr/>
+          <a:lstStyle/>
+          <a:p>
+            <a:r>
+              <a:rPr lang="fr-FR" dirty="0" err="1"/>
+              <a:t>Retrieval</a:t>
+            </a:r>
+            <a:r>
+              <a:rPr lang="fr-FR" dirty="0"/>
+              <a:t> augmenté</a:t>
+            </a:r>
+          </a:p>
+        </p:txBody>
+      </p:sp>
+      <p:sp>
+        <p:nvSpPr>
+          <p:cNvPr id="3" name="Espace réservé du contenu 2">
+            <a:extLst>
+              <a:ext uri="{FF2B5EF4-FFF2-40B4-BE49-F238E27FC236}">
+                <a16:creationId xmlns:a16="http://schemas.microsoft.com/office/drawing/2014/main" id="{AF82241C-6832-F692-4788-C7F567F3915F}"/>
+              </a:ext>
+            </a:extLst>
+          </p:cNvPr>
+          <p:cNvSpPr>
+            <a:spLocks noGrp="1"/>
+          </p:cNvSpPr>
+          <p:nvPr>
+            <p:ph idx="1"/>
+          </p:nvPr>
+        </p:nvSpPr>
+        <p:spPr/>
+        <p:txBody>
+          <a:bodyPr/>
+          <a:lstStyle/>
+          <a:p>
+            <a:r>
+              <a:rPr lang="fr-FR" dirty="0"/>
+              <a:t>Il est possible de retrouver les </a:t>
+            </a:r>
+            <a:r>
+              <a:rPr lang="fr-FR" dirty="0" err="1"/>
+              <a:t>chunks</a:t>
+            </a:r>
+            <a:r>
+              <a:rPr lang="fr-FR" dirty="0"/>
+              <a:t> et de les réinjecter dans le prompt du LLM</a:t>
+            </a:r>
+          </a:p>
+          <a:p>
+            <a:pPr lvl="1"/>
+            <a:r>
+              <a:rPr lang="fr-FR" dirty="0"/>
+              <a:t>Retour d'une réponse augmentée</a:t>
+            </a:r>
+          </a:p>
+          <a:p>
+            <a:pPr lvl="1"/>
+            <a:r>
+              <a:rPr lang="fr-FR" dirty="0"/>
+              <a:t>Dépendant du k de </a:t>
+            </a:r>
+            <a:r>
+              <a:rPr lang="fr-FR" dirty="0" err="1"/>
+              <a:t>kNN</a:t>
+            </a:r>
+            <a:endParaRPr lang="fr-FR" dirty="0"/>
+          </a:p>
+          <a:p>
+            <a:r>
+              <a:rPr lang="fr-FR" dirty="0"/>
+              <a:t>Combien prendre de k?</a:t>
+            </a:r>
+          </a:p>
+        </p:txBody>
+      </p:sp>
+      <p:pic>
+        <p:nvPicPr>
+          <p:cNvPr id="7" name="Image 6">
+            <a:extLst>
+              <a:ext uri="{FF2B5EF4-FFF2-40B4-BE49-F238E27FC236}">
+                <a16:creationId xmlns:a16="http://schemas.microsoft.com/office/drawing/2014/main" id="{D790E74C-C14F-98D0-9501-2579DAEA168F}"/>
+              </a:ext>
+            </a:extLst>
+          </p:cNvPr>
+          <p:cNvPicPr>
+            <a:picLocks noChangeAspect="1"/>
+          </p:cNvPicPr>
+          <p:nvPr/>
+        </p:nvPicPr>
+        <p:blipFill>
+          <a:blip r:embed="rId2"/>
+          <a:stretch>
+            <a:fillRect/>
+          </a:stretch>
+        </p:blipFill>
+        <p:spPr>
+          <a:xfrm>
+            <a:off x="6876256" y="2842857"/>
+            <a:ext cx="1933845" cy="3610479"/>
+          </a:xfrm>
+          <a:prstGeom prst="rect">
+            <a:avLst/>
+          </a:prstGeom>
+        </p:spPr>
+      </p:pic>
+    </p:spTree>
+    <p:extLst>
+      <p:ext uri="{BB962C8B-B14F-4D97-AF65-F5344CB8AC3E}">
+        <p14:creationId xmlns:p14="http://schemas.microsoft.com/office/powerpoint/2010/main" val="3868285167"/>
+      </p:ext>
+    </p:extLst>
+  </p:cSld>
+  <p:clrMapOvr>
+    <a:masterClrMapping/>
+  </p:clrMapOvr>
+</p:sld>
+</file>
+
+<file path=ppt/slides/slide18.xml><?xml version="1.0" encoding="utf-8"?>
+<p:sld xmlns:a="http://schemas.openxmlformats.org/drawingml/2006/main" xmlns:r="http://schemas.openxmlformats.org/officeDocument/2006/relationships" xmlns:p="http://schemas.openxmlformats.org/presentationml/2006/main">
+  <p:cSld>
+    <p:spTree>
+      <p:nvGrpSpPr>
+        <p:cNvPr id="1" name=""/>
+        <p:cNvGrpSpPr/>
+        <p:nvPr/>
+      </p:nvGrpSpPr>
+      <p:grpSpPr>
+        <a:xfrm>
+          <a:off x="0" y="0"/>
+          <a:ext cx="0" cy="0"/>
+          <a:chOff x="0" y="0"/>
+          <a:chExt cx="0" cy="0"/>
+        </a:xfrm>
+      </p:grpSpPr>
+      <p:sp>
+        <p:nvSpPr>
+          <p:cNvPr id="2" name="Titre 1">
+            <a:extLst>
+              <a:ext uri="{FF2B5EF4-FFF2-40B4-BE49-F238E27FC236}">
+                <a16:creationId xmlns:a16="http://schemas.microsoft.com/office/drawing/2014/main" id="{992EFD8E-4F0C-FFFF-6162-D6838C8A6AB1}"/>
+              </a:ext>
+            </a:extLst>
+          </p:cNvPr>
+          <p:cNvSpPr>
+            <a:spLocks noGrp="1"/>
+          </p:cNvSpPr>
+          <p:nvPr>
+            <p:ph type="title"/>
+          </p:nvPr>
+        </p:nvSpPr>
+        <p:spPr/>
+        <p:txBody>
+          <a:bodyPr/>
+          <a:lstStyle/>
+          <a:p>
+            <a:r>
+              <a:rPr lang="fr-FR" dirty="0"/>
+              <a:t>Injection des </a:t>
+            </a:r>
+            <a:r>
+              <a:rPr lang="fr-FR" dirty="0" err="1"/>
+              <a:t>embeddings</a:t>
+            </a:r>
+            <a:endParaRPr lang="fr-FR" dirty="0"/>
+          </a:p>
+        </p:txBody>
+      </p:sp>
+      <p:sp>
+        <p:nvSpPr>
+          <p:cNvPr id="3" name="Espace réservé du contenu 2">
+            <a:extLst>
+              <a:ext uri="{FF2B5EF4-FFF2-40B4-BE49-F238E27FC236}">
+                <a16:creationId xmlns:a16="http://schemas.microsoft.com/office/drawing/2014/main" id="{6CD3A8AA-C390-0049-CA52-388642CBBD5C}"/>
+              </a:ext>
+            </a:extLst>
+          </p:cNvPr>
+          <p:cNvSpPr>
+            <a:spLocks noGrp="1"/>
+          </p:cNvSpPr>
+          <p:nvPr>
+            <p:ph idx="1"/>
+          </p:nvPr>
+        </p:nvSpPr>
+        <p:spPr/>
+        <p:txBody>
+          <a:bodyPr/>
+          <a:lstStyle/>
+          <a:p>
+            <a:r>
+              <a:rPr lang="fr-FR" dirty="0"/>
+              <a:t>Les vecteurs sont plus légers que les documents originels</a:t>
+            </a:r>
+          </a:p>
+          <a:p>
+            <a:pPr lvl="1"/>
+            <a:r>
+              <a:rPr lang="fr-FR" dirty="0"/>
+              <a:t>Plutôt que de réinjecter les </a:t>
+            </a:r>
+            <a:r>
+              <a:rPr lang="fr-FR" dirty="0" err="1"/>
+              <a:t>chunks</a:t>
+            </a:r>
+            <a:r>
+              <a:rPr lang="fr-FR" dirty="0"/>
+              <a:t> dans le prompt il est possible de réinjecter directement les vecteurs</a:t>
+            </a:r>
+          </a:p>
+          <a:p>
+            <a:pPr lvl="1"/>
+            <a:r>
+              <a:rPr lang="fr-FR" dirty="0"/>
+              <a:t>Nécessite d'être </a:t>
+            </a:r>
+            <a:r>
+              <a:rPr lang="fr-FR" dirty="0" err="1"/>
+              <a:t>embedder</a:t>
+            </a:r>
+            <a:r>
+              <a:rPr lang="fr-FR" dirty="0"/>
+              <a:t> avec un modèle compatible</a:t>
+            </a:r>
+          </a:p>
+          <a:p>
+            <a:pPr lvl="1"/>
+            <a:r>
+              <a:rPr lang="fr-FR" dirty="0"/>
+              <a:t>Mistral AI compatible uniquement avec mistral-</a:t>
+            </a:r>
+            <a:r>
+              <a:rPr lang="fr-FR" dirty="0" err="1"/>
+              <a:t>embed</a:t>
+            </a:r>
+            <a:endParaRPr lang="fr-FR" dirty="0"/>
+          </a:p>
+          <a:p>
+            <a:pPr lvl="1"/>
+            <a:r>
+              <a:rPr lang="fr-FR" dirty="0"/>
+              <a:t>Propriétaire à chaque modèle</a:t>
+            </a:r>
+          </a:p>
+          <a:p>
+            <a:endParaRPr lang="fr-FR" dirty="0"/>
+          </a:p>
+        </p:txBody>
+      </p:sp>
+    </p:spTree>
+    <p:extLst>
+      <p:ext uri="{BB962C8B-B14F-4D97-AF65-F5344CB8AC3E}">
+        <p14:creationId xmlns:p14="http://schemas.microsoft.com/office/powerpoint/2010/main" val="1652826858"/>
+      </p:ext>
+    </p:extLst>
+  </p:cSld>
+  <p:clrMapOvr>
+    <a:masterClrMapping/>
+  </p:clrMapOvr>
+</p:sld>
+</file>
+
+<file path=ppt/slides/slide19.xml><?xml version="1.0" encoding="utf-8"?>
+<p:sld xmlns:a="http://schemas.openxmlformats.org/drawingml/2006/main" xmlns:r="http://schemas.openxmlformats.org/officeDocument/2006/relationships" xmlns:p="http://schemas.openxmlformats.org/presentationml/2006/main">
+  <p:cSld>
+    <p:spTree>
+      <p:nvGrpSpPr>
+        <p:cNvPr id="1" name=""/>
+        <p:cNvGrpSpPr/>
+        <p:nvPr/>
+      </p:nvGrpSpPr>
+      <p:grpSpPr>
+        <a:xfrm>
+          <a:off x="0" y="0"/>
+          <a:ext cx="0" cy="0"/>
+          <a:chOff x="0" y="0"/>
+          <a:chExt cx="0" cy="0"/>
+        </a:xfrm>
+      </p:grpSpPr>
+      <p:sp>
+        <p:nvSpPr>
+          <p:cNvPr id="2" name="Titre 1">
+            <a:extLst>
+              <a:ext uri="{FF2B5EF4-FFF2-40B4-BE49-F238E27FC236}">
+                <a16:creationId xmlns:a16="http://schemas.microsoft.com/office/drawing/2014/main" id="{AD476E44-BE25-3057-5615-3FE82B3B745E}"/>
+              </a:ext>
+            </a:extLst>
+          </p:cNvPr>
+          <p:cNvSpPr>
+            <a:spLocks noGrp="1"/>
+          </p:cNvSpPr>
+          <p:nvPr>
+            <p:ph type="title"/>
+          </p:nvPr>
+        </p:nvSpPr>
+        <p:spPr/>
+        <p:txBody>
+          <a:bodyPr/>
+          <a:lstStyle/>
+          <a:p>
+            <a:r>
+              <a:rPr lang="fr-FR" dirty="0"/>
+              <a:t>Augmentation</a:t>
+            </a:r>
+          </a:p>
+        </p:txBody>
+      </p:sp>
+      <p:sp>
+        <p:nvSpPr>
+          <p:cNvPr id="3" name="Espace réservé du contenu 2">
+            <a:extLst>
+              <a:ext uri="{FF2B5EF4-FFF2-40B4-BE49-F238E27FC236}">
+                <a16:creationId xmlns:a16="http://schemas.microsoft.com/office/drawing/2014/main" id="{8808C0F0-740E-82BB-4F19-7C6C73487FF4}"/>
+              </a:ext>
+            </a:extLst>
+          </p:cNvPr>
+          <p:cNvSpPr>
+            <a:spLocks noGrp="1"/>
+          </p:cNvSpPr>
+          <p:nvPr>
+            <p:ph idx="1"/>
+          </p:nvPr>
+        </p:nvSpPr>
+        <p:spPr/>
+        <p:txBody>
+          <a:bodyPr/>
+          <a:lstStyle/>
+          <a:p>
+            <a:r>
+              <a:rPr lang="fr-FR" dirty="0"/>
+              <a:t>Les vecteurs injectés représentent le contexte du LLM</a:t>
+            </a:r>
+          </a:p>
+          <a:p>
+            <a:r>
+              <a:rPr lang="fr-FR" dirty="0"/>
+              <a:t>La réponse du LLM est </a:t>
+            </a:r>
+            <a:r>
+              <a:rPr lang="fr-FR"/>
+              <a:t>une augmentation</a:t>
+            </a:r>
+          </a:p>
+        </p:txBody>
+      </p:sp>
+    </p:spTree>
+    <p:extLst>
+      <p:ext uri="{BB962C8B-B14F-4D97-AF65-F5344CB8AC3E}">
+        <p14:creationId xmlns:p14="http://schemas.microsoft.com/office/powerpoint/2010/main" val="3990228214"/>
+      </p:ext>
+    </p:extLst>
+  </p:cSld>
+  <p:clrMapOvr>
+    <a:masterClrMapping/>
+  </p:clrMapOvr>
+</p:sld>
+</file>
+
 <file path=ppt/slides/slide2.xml><?xml version="1.0" encoding="utf-8"?>
 <p:sld xmlns:a="http://schemas.openxmlformats.org/drawingml/2006/main" xmlns:r="http://schemas.openxmlformats.org/officeDocument/2006/relationships" xmlns:p="http://schemas.openxmlformats.org/presentationml/2006/main">
   <p:cSld>
@@ -3888,6 +5372,173 @@
           <p:cNvPr id="2" name="Titre 1">
             <a:extLst>
               <a:ext uri="{FF2B5EF4-FFF2-40B4-BE49-F238E27FC236}">
+                <a16:creationId xmlns:a16="http://schemas.microsoft.com/office/drawing/2014/main" id="{F608D9C6-E00B-73F5-8813-9BC5D7F7CEC0}"/>
+              </a:ext>
+            </a:extLst>
+          </p:cNvPr>
+          <p:cNvSpPr>
+            <a:spLocks noGrp="1"/>
+          </p:cNvSpPr>
+          <p:nvPr>
+            <p:ph type="title"/>
+          </p:nvPr>
+        </p:nvSpPr>
+        <p:spPr/>
+        <p:txBody>
+          <a:bodyPr/>
+          <a:lstStyle/>
+          <a:p>
+            <a:r>
+              <a:rPr lang="fr-FR" dirty="0"/>
+              <a:t>Calcul des distances</a:t>
+            </a:r>
+          </a:p>
+        </p:txBody>
+      </p:sp>
+      <p:sp>
+        <p:nvSpPr>
+          <p:cNvPr id="3" name="Espace réservé du contenu 2">
+            <a:extLst>
+              <a:ext uri="{FF2B5EF4-FFF2-40B4-BE49-F238E27FC236}">
+                <a16:creationId xmlns:a16="http://schemas.microsoft.com/office/drawing/2014/main" id="{07902110-FF0B-E608-29E4-A9C169CE00CD}"/>
+              </a:ext>
+            </a:extLst>
+          </p:cNvPr>
+          <p:cNvSpPr>
+            <a:spLocks noGrp="1"/>
+          </p:cNvSpPr>
+          <p:nvPr>
+            <p:ph idx="1"/>
+          </p:nvPr>
+        </p:nvSpPr>
+        <p:spPr/>
+        <p:txBody>
+          <a:bodyPr/>
+          <a:lstStyle/>
+          <a:p>
+            <a:r>
+              <a:rPr lang="fr-FR" dirty="0"/>
+              <a:t>Après chainage des </a:t>
+            </a:r>
+            <a:r>
+              <a:rPr lang="fr-FR" dirty="0" err="1"/>
+              <a:t>transformers</a:t>
+            </a:r>
+            <a:r>
+              <a:rPr lang="fr-FR" dirty="0"/>
+              <a:t> </a:t>
+            </a:r>
+            <a:r>
+              <a:rPr lang="fr-FR" dirty="0" err="1"/>
+              <a:t>précedents</a:t>
+            </a:r>
+            <a:endParaRPr lang="fr-FR" dirty="0"/>
+          </a:p>
+          <a:p>
+            <a:pPr lvl="1"/>
+            <a:r>
+              <a:rPr lang="fr-FR" dirty="0" err="1"/>
+              <a:t>Chunk</a:t>
+            </a:r>
+            <a:endParaRPr lang="fr-FR" dirty="0"/>
+          </a:p>
+          <a:p>
+            <a:pPr lvl="1"/>
+            <a:r>
+              <a:rPr lang="fr-FR" dirty="0" err="1"/>
+              <a:t>Embedding</a:t>
+            </a:r>
+            <a:endParaRPr lang="fr-FR" dirty="0"/>
+          </a:p>
+          <a:p>
+            <a:r>
+              <a:rPr lang="fr-FR" dirty="0"/>
+              <a:t>Il faut poser une question au RAG</a:t>
+            </a:r>
+          </a:p>
+          <a:p>
+            <a:pPr lvl="1"/>
+            <a:r>
+              <a:rPr lang="fr-FR" dirty="0"/>
+              <a:t>On applique également un </a:t>
+            </a:r>
+            <a:r>
+              <a:rPr lang="fr-FR" dirty="0" err="1"/>
+              <a:t>embedding</a:t>
+            </a:r>
+            <a:r>
+              <a:rPr lang="fr-FR" dirty="0"/>
+              <a:t> sur la question</a:t>
+            </a:r>
+          </a:p>
+          <a:p>
+            <a:r>
+              <a:rPr lang="fr-FR" dirty="0"/>
+              <a:t>Puis il faut mesurer des distances</a:t>
+            </a:r>
+          </a:p>
+          <a:p>
+            <a:pPr lvl="1"/>
+            <a:r>
+              <a:rPr lang="fr-FR" dirty="0"/>
+              <a:t>Avec une les modèle et algorithmes de distance vu précédemment</a:t>
+            </a:r>
+          </a:p>
+          <a:p>
+            <a:r>
+              <a:rPr lang="fr-FR" dirty="0"/>
+              <a:t>Puis il faut choisir les vecteurs les plus proches</a:t>
+            </a:r>
+          </a:p>
+          <a:p>
+            <a:pPr lvl="1"/>
+            <a:r>
+              <a:rPr lang="fr-FR" dirty="0"/>
+              <a:t>Modèle de type </a:t>
+            </a:r>
+            <a:r>
+              <a:rPr lang="fr-FR" dirty="0" err="1"/>
+              <a:t>kNN</a:t>
+            </a:r>
+            <a:endParaRPr lang="fr-FR" dirty="0"/>
+          </a:p>
+        </p:txBody>
+      </p:sp>
+    </p:spTree>
+    <p:extLst>
+      <p:ext uri="{BB962C8B-B14F-4D97-AF65-F5344CB8AC3E}">
+        <p14:creationId xmlns:p14="http://schemas.microsoft.com/office/powerpoint/2010/main" val="3828332342"/>
+      </p:ext>
+    </p:extLst>
+  </p:cSld>
+  <p:clrMapOvr>
+    <a:masterClrMapping/>
+  </p:clrMapOvr>
+</p:sld>
+</file>
+
+<file path=ppt/slides/slide4.xml><?xml version="1.0" encoding="utf-8"?>
+<p:sld xmlns:a="http://schemas.openxmlformats.org/drawingml/2006/main" xmlns:r="http://schemas.openxmlformats.org/officeDocument/2006/relationships" xmlns:p="http://schemas.openxmlformats.org/presentationml/2006/main">
+  <p:cSld>
+    <p:spTree>
+      <p:nvGrpSpPr>
+        <p:cNvPr id="1" name=""/>
+        <p:cNvGrpSpPr/>
+        <p:nvPr/>
+      </p:nvGrpSpPr>
+      <p:grpSpPr>
+        <a:xfrm>
+          <a:off x="0" y="0"/>
+          <a:ext cx="0" cy="0"/>
+          <a:chOff x="0" y="0"/>
+          <a:chExt cx="0" cy="0"/>
+        </a:xfrm>
+      </p:grpSpPr>
+      <p:sp>
+        <p:nvSpPr>
+          <p:cNvPr id="2" name="Titre 1">
+            <a:extLst>
+              <a:ext uri="{FF2B5EF4-FFF2-40B4-BE49-F238E27FC236}">
                 <a16:creationId xmlns:a16="http://schemas.microsoft.com/office/drawing/2014/main" id="{00668087-C8DE-6A25-0AA4-F90B26CC5B99}"/>
               </a:ext>
             </a:extLst>
@@ -3992,180 +5643,7 @@
     </p:spTree>
     <p:extLst>
       <p:ext uri="{BB962C8B-B14F-4D97-AF65-F5344CB8AC3E}">
-        <p14:creationId xmlns:p14="http://schemas.microsoft.com/office/powerpoint/2010/main" val="4012055677"/>
-      </p:ext>
-    </p:extLst>
-  </p:cSld>
-  <p:clrMapOvr>
-    <a:masterClrMapping/>
-  </p:clrMapOvr>
-</p:sld>
-</file>
-
-<file path=ppt/slides/slide4.xml><?xml version="1.0" encoding="utf-8"?>
-<p:sld xmlns:a="http://schemas.openxmlformats.org/drawingml/2006/main" xmlns:r="http://schemas.openxmlformats.org/officeDocument/2006/relationships" xmlns:p="http://schemas.openxmlformats.org/presentationml/2006/main">
-  <p:cSld>
-    <p:spTree>
-      <p:nvGrpSpPr>
-        <p:cNvPr id="1" name=""/>
-        <p:cNvGrpSpPr/>
-        <p:nvPr/>
-      </p:nvGrpSpPr>
-      <p:grpSpPr>
-        <a:xfrm>
-          <a:off x="0" y="0"/>
-          <a:ext cx="0" cy="0"/>
-          <a:chOff x="0" y="0"/>
-          <a:chExt cx="0" cy="0"/>
-        </a:xfrm>
-      </p:grpSpPr>
-      <p:sp>
-        <p:nvSpPr>
-          <p:cNvPr id="2" name="Titre 1">
-            <a:extLst>
-              <a:ext uri="{FF2B5EF4-FFF2-40B4-BE49-F238E27FC236}">
-                <a16:creationId xmlns:a16="http://schemas.microsoft.com/office/drawing/2014/main" id="{A6A88D71-EB7F-3E7C-C95B-3917194CFDBE}"/>
-              </a:ext>
-            </a:extLst>
-          </p:cNvPr>
-          <p:cNvSpPr>
-            <a:spLocks noGrp="1"/>
-          </p:cNvSpPr>
-          <p:nvPr>
-            <p:ph type="title"/>
-          </p:nvPr>
-        </p:nvSpPr>
-        <p:spPr/>
-        <p:txBody>
-          <a:bodyPr/>
-          <a:lstStyle/>
-          <a:p>
-            <a:r>
-              <a:rPr lang="fr-FR" dirty="0" err="1"/>
-              <a:t>Retrieval</a:t>
-            </a:r>
-            <a:endParaRPr lang="fr-FR" dirty="0"/>
-          </a:p>
-        </p:txBody>
-      </p:sp>
-      <p:sp>
-        <p:nvSpPr>
-          <p:cNvPr id="3" name="Espace réservé du contenu 2">
-            <a:extLst>
-              <a:ext uri="{FF2B5EF4-FFF2-40B4-BE49-F238E27FC236}">
-                <a16:creationId xmlns:a16="http://schemas.microsoft.com/office/drawing/2014/main" id="{00027C64-0046-5A20-A35B-071B14E621B0}"/>
-              </a:ext>
-            </a:extLst>
-          </p:cNvPr>
-          <p:cNvSpPr>
-            <a:spLocks noGrp="1"/>
-          </p:cNvSpPr>
-          <p:nvPr>
-            <p:ph idx="1"/>
-          </p:nvPr>
-        </p:nvSpPr>
-        <p:spPr/>
-        <p:txBody>
-          <a:bodyPr/>
-          <a:lstStyle/>
-          <a:p>
-            <a:r>
-              <a:rPr lang="fr-FR" dirty="0"/>
-              <a:t>Le </a:t>
-            </a:r>
-            <a:r>
-              <a:rPr lang="fr-FR" dirty="0" err="1"/>
-              <a:t>retrieval</a:t>
-            </a:r>
-            <a:r>
-              <a:rPr lang="fr-FR" dirty="0"/>
-              <a:t> consiste à parcourir la BD de vecteurs pour trouver les vecteurs les plus proche du prompt</a:t>
-            </a:r>
-          </a:p>
-          <a:p>
-            <a:pPr lvl="1"/>
-            <a:r>
-              <a:rPr lang="fr-FR" dirty="0"/>
-              <a:t>Modèle </a:t>
-            </a:r>
-            <a:r>
-              <a:rPr lang="fr-FR" dirty="0" err="1"/>
-              <a:t>kNN</a:t>
-            </a:r>
-            <a:r>
-              <a:rPr lang="fr-FR" dirty="0"/>
-              <a:t> : k </a:t>
-            </a:r>
-            <a:r>
-              <a:rPr lang="fr-FR" dirty="0" err="1"/>
-              <a:t>Nearest</a:t>
-            </a:r>
-            <a:r>
-              <a:rPr lang="fr-FR" dirty="0"/>
-              <a:t> Neighbors</a:t>
-            </a:r>
-          </a:p>
-          <a:p>
-            <a:pPr lvl="1"/>
-            <a:r>
-              <a:rPr lang="fr-FR" dirty="0"/>
-              <a:t>Framework </a:t>
-            </a:r>
-            <a:r>
-              <a:rPr lang="fr-FR" dirty="0" err="1"/>
-              <a:t>Scikit-learn</a:t>
-            </a:r>
-            <a:r>
-              <a:rPr lang="fr-FR" dirty="0"/>
-              <a:t> ou </a:t>
-            </a:r>
-            <a:r>
-              <a:rPr lang="fr-FR" dirty="0" err="1"/>
-              <a:t>np.vstack</a:t>
-            </a:r>
-            <a:endParaRPr lang="fr-FR" dirty="0"/>
-          </a:p>
-          <a:p>
-            <a:pPr lvl="1"/>
-            <a:r>
-              <a:rPr lang="fr-FR" dirty="0"/>
-              <a:t>Nécessite d'être rapide</a:t>
-            </a:r>
-          </a:p>
-          <a:p>
-            <a:pPr lvl="1"/>
-            <a:r>
-              <a:rPr lang="fr-FR" dirty="0"/>
-              <a:t>GPU recommandé</a:t>
-            </a:r>
-          </a:p>
-          <a:p>
-            <a:pPr lvl="1"/>
-            <a:r>
-              <a:rPr lang="fr-FR" dirty="0"/>
-              <a:t>k varie de 1 à quelques dizaines</a:t>
-            </a:r>
-          </a:p>
-          <a:p>
-            <a:r>
-              <a:rPr lang="fr-FR" dirty="0"/>
-              <a:t>Le </a:t>
-            </a:r>
-            <a:r>
-              <a:rPr lang="fr-FR"/>
-              <a:t>Retrieval</a:t>
-            </a:r>
-            <a:r>
-              <a:rPr lang="fr-FR" dirty="0"/>
-              <a:t> retourne donc une liste de vecteurs triés avec les scores</a:t>
-            </a:r>
-          </a:p>
-        </p:txBody>
-      </p:sp>
-    </p:spTree>
-    <p:extLst>
-      <p:ext uri="{BB962C8B-B14F-4D97-AF65-F5344CB8AC3E}">
-        <p14:creationId xmlns:p14="http://schemas.microsoft.com/office/powerpoint/2010/main" val="4246885626"/>
+        <p14:creationId xmlns:p14="http://schemas.microsoft.com/office/powerpoint/2010/main" val="3100721579"/>
       </p:ext>
     </p:extLst>
   </p:cSld>
@@ -4194,13 +5672,7 @@
       </p:grpSpPr>
       <p:sp>
         <p:nvSpPr>
-          <p:cNvPr id="2" name="Titre 1">
-            <a:extLst>
-              <a:ext uri="{FF2B5EF4-FFF2-40B4-BE49-F238E27FC236}">
-                <a16:creationId xmlns:a16="http://schemas.microsoft.com/office/drawing/2014/main" id="{0C9F7A1D-2A5D-7D9E-E291-8F22C715FCB3}"/>
-              </a:ext>
-            </a:extLst>
-          </p:cNvPr>
+          <p:cNvPr id="2" name="Titre 1"/>
           <p:cNvSpPr>
             <a:spLocks noGrp="1"/>
           </p:cNvSpPr>
@@ -4213,19 +5685,21 @@
           <a:bodyPr/>
           <a:lstStyle/>
           <a:p>
-            <a:endParaRPr lang="fr-FR"/>
+            <a:r>
+              <a:rPr lang="fr-FR" altLang="fr-FR" dirty="0" err="1"/>
+              <a:t>Nearest</a:t>
+            </a:r>
+            <a:r>
+              <a:rPr lang="fr-FR" altLang="fr-FR" dirty="0"/>
+              <a:t> Neighbors</a:t>
+            </a:r>
+            <a:endParaRPr lang="fr-FR" dirty="0"/>
           </a:p>
         </p:txBody>
       </p:sp>
       <p:sp>
         <p:nvSpPr>
-          <p:cNvPr id="3" name="Espace réservé du contenu 2">
-            <a:extLst>
-              <a:ext uri="{FF2B5EF4-FFF2-40B4-BE49-F238E27FC236}">
-                <a16:creationId xmlns:a16="http://schemas.microsoft.com/office/drawing/2014/main" id="{9C5A74C8-3A91-4851-F6C5-F9869F199151}"/>
-              </a:ext>
-            </a:extLst>
-          </p:cNvPr>
+          <p:cNvPr id="3" name="Espace réservé du contenu 2"/>
           <p:cNvSpPr>
             <a:spLocks noGrp="1"/>
           </p:cNvSpPr>
@@ -4238,61 +5712,41 @@
           <a:bodyPr/>
           <a:lstStyle/>
           <a:p>
-            <a:endParaRPr lang="fr-FR"/>
+            <a:r>
+              <a:rPr lang="fr-FR" dirty="0"/>
+              <a:t>Le k-NN est le diminutif de k </a:t>
+            </a:r>
+            <a:r>
+              <a:rPr lang="fr-FR" dirty="0" err="1"/>
+              <a:t>Nearest</a:t>
+            </a:r>
+            <a:r>
+              <a:rPr lang="fr-FR" dirty="0"/>
+              <a:t> Neighbors</a:t>
+            </a:r>
+          </a:p>
+          <a:p>
+            <a:r>
+              <a:rPr lang="fr-FR" dirty="0"/>
+              <a:t>C’est un algorithme qui peut servir autant pour la classification que la régression</a:t>
+            </a:r>
+          </a:p>
+          <a:p>
+            <a:r>
+              <a:rPr lang="fr-FR" dirty="0"/>
+              <a:t>Son principe est de choisir les k données les plus proches du point étudié afin d’en prédire sa valeur</a:t>
+            </a:r>
+          </a:p>
+          <a:p>
+            <a:pPr lvl="1"/>
+            <a:endParaRPr lang="fr-FR" dirty="0"/>
           </a:p>
         </p:txBody>
       </p:sp>
-      <p:pic>
-        <p:nvPicPr>
-          <p:cNvPr id="1026" name="Picture 2" descr="retrieval_diagram">
-            <a:extLst>
-              <a:ext uri="{FF2B5EF4-FFF2-40B4-BE49-F238E27FC236}">
-                <a16:creationId xmlns:a16="http://schemas.microsoft.com/office/drawing/2014/main" id="{6F697095-20DB-B2E2-FF98-8E4CA9C4BCC9}"/>
-              </a:ext>
-            </a:extLst>
-          </p:cNvPr>
-          <p:cNvPicPr>
-            <a:picLocks noChangeAspect="1" noChangeArrowheads="1"/>
-          </p:cNvPicPr>
-          <p:nvPr/>
-        </p:nvPicPr>
-        <p:blipFill>
-          <a:blip r:embed="rId2" cstate="print">
-            <a:extLst>
-              <a:ext uri="{28A0092B-C50C-407E-A947-70E740481C1C}">
-                <a14:useLocalDpi xmlns:a14="http://schemas.microsoft.com/office/drawing/2010/main" val="0"/>
-              </a:ext>
-            </a:extLst>
-          </a:blip>
-          <a:srcRect/>
-          <a:stretch>
-            <a:fillRect/>
-          </a:stretch>
-        </p:blipFill>
-        <p:spPr bwMode="auto">
-          <a:xfrm>
-            <a:off x="0" y="1082675"/>
-            <a:ext cx="9144000" cy="4691063"/>
-          </a:xfrm>
-          <a:prstGeom prst="rect">
-            <a:avLst/>
-          </a:prstGeom>
-          <a:noFill/>
-          <a:extLst>
-            <a:ext uri="{909E8E84-426E-40DD-AFC4-6F175D3DCCD1}">
-              <a14:hiddenFill xmlns:a14="http://schemas.microsoft.com/office/drawing/2010/main">
-                <a:solidFill>
-                  <a:srgbClr val="FFFFFF"/>
-                </a:solidFill>
-              </a14:hiddenFill>
-            </a:ext>
-          </a:extLst>
-        </p:spPr>
-      </p:pic>
     </p:spTree>
     <p:extLst>
       <p:ext uri="{BB962C8B-B14F-4D97-AF65-F5344CB8AC3E}">
-        <p14:creationId xmlns:p14="http://schemas.microsoft.com/office/powerpoint/2010/main" val="1756472312"/>
+        <p14:creationId xmlns:p14="http://schemas.microsoft.com/office/powerpoint/2010/main" val="1498605448"/>
       </p:ext>
     </p:extLst>
   </p:cSld>
@@ -4321,13 +5775,7 @@
       </p:grpSpPr>
       <p:sp>
         <p:nvSpPr>
-          <p:cNvPr id="2" name="Titre 1">
-            <a:extLst>
-              <a:ext uri="{FF2B5EF4-FFF2-40B4-BE49-F238E27FC236}">
-                <a16:creationId xmlns:a16="http://schemas.microsoft.com/office/drawing/2014/main" id="{50A45055-9DC2-9613-FA9F-8234BE282755}"/>
-              </a:ext>
-            </a:extLst>
-          </p:cNvPr>
+          <p:cNvPr id="2" name="Titre 1"/>
           <p:cNvSpPr>
             <a:spLocks noGrp="1"/>
           </p:cNvSpPr>
@@ -4342,20 +5790,14 @@
           <a:p>
             <a:r>
               <a:rPr lang="fr-FR" dirty="0"/>
-              <a:t>Scores</a:t>
+              <a:t>Explication</a:t>
             </a:r>
           </a:p>
         </p:txBody>
       </p:sp>
       <p:sp>
         <p:nvSpPr>
-          <p:cNvPr id="3" name="Espace réservé du contenu 2">
-            <a:extLst>
-              <a:ext uri="{FF2B5EF4-FFF2-40B4-BE49-F238E27FC236}">
-                <a16:creationId xmlns:a16="http://schemas.microsoft.com/office/drawing/2014/main" id="{5BF520CE-9D9F-1351-0554-264AB6E8BF6F}"/>
-              </a:ext>
-            </a:extLst>
-          </p:cNvPr>
+          <p:cNvPr id="3" name="Espace réservé du contenu 2"/>
           <p:cNvSpPr>
             <a:spLocks noGrp="1"/>
           </p:cNvSpPr>
@@ -4370,83 +5812,65 @@
           <a:p>
             <a:r>
               <a:rPr lang="fr-FR" dirty="0"/>
-              <a:t>Les meilleurs vecteurs sont retournés</a:t>
-            </a:r>
-          </a:p>
-          <a:p>
-            <a:pPr lvl="1"/>
-            <a:r>
-              <a:rPr lang="fr-FR" dirty="0"/>
-              <a:t>Triés par score</a:t>
-            </a:r>
-          </a:p>
-          <a:p>
-            <a:pPr lvl="1"/>
-            <a:r>
-              <a:rPr lang="en-US" dirty="0" err="1"/>
-              <a:t>cosine_similarity</a:t>
-            </a:r>
-            <a:r>
-              <a:rPr lang="en-US" dirty="0"/>
-              <a:t>(</a:t>
-            </a:r>
-            <a:r>
-              <a:rPr lang="en-US" dirty="0" err="1"/>
-              <a:t>query_embedding</a:t>
-            </a:r>
-            <a:r>
-              <a:rPr lang="en-US" dirty="0"/>
-              <a:t>, </a:t>
-            </a:r>
-            <a:r>
-              <a:rPr lang="en-US" dirty="0" err="1"/>
-              <a:t>np.vstack</a:t>
-            </a:r>
-            <a:r>
-              <a:rPr lang="en-US" dirty="0"/>
-              <a:t>(embeddings))</a:t>
-            </a:r>
+              <a:t>Quelle est la classe de la nouvelle données (en blanc) ?</a:t>
+            </a:r>
+          </a:p>
+          <a:p>
+            <a:pPr marL="0" indent="0">
+              <a:buNone/>
+            </a:pPr>
             <a:endParaRPr lang="fr-FR" dirty="0"/>
           </a:p>
           <a:p>
-            <a:pPr lvl="1"/>
-            <a:r>
-              <a:rPr lang="fr-FR" dirty="0"/>
-              <a:t>Très rapide</a:t>
-            </a:r>
-          </a:p>
-          <a:p>
-            <a:r>
-              <a:rPr lang="fr-FR" dirty="0"/>
-              <a:t>Gestion de la précision de la réponse</a:t>
-            </a:r>
-          </a:p>
-          <a:p>
-            <a:r>
-              <a:rPr lang="fr-FR" dirty="0"/>
-              <a:t>Meilleur gestion des hallucinations</a:t>
-            </a:r>
-          </a:p>
-          <a:p>
-            <a:pPr lvl="1"/>
-            <a:r>
-              <a:rPr lang="fr-FR" dirty="0"/>
-              <a:t>Si le meilleurs score est trop faible</a:t>
-            </a:r>
-          </a:p>
-          <a:p>
-            <a:pPr lvl="1"/>
-            <a:r>
-              <a:rPr lang="fr-FR" dirty="0"/>
-              <a:t>J ne sais pas !</a:t>
-            </a:r>
+            <a:endParaRPr lang="fr-FR" dirty="0"/>
           </a:p>
         </p:txBody>
       </p:sp>
+      <p:pic>
+        <p:nvPicPr>
+          <p:cNvPr id="1028" name="Picture 4" descr="le point blanc est une nouvelle entrée"/>
+          <p:cNvPicPr>
+            <a:picLocks noChangeAspect="1" noChangeArrowheads="1"/>
+          </p:cNvPicPr>
+          <p:nvPr/>
+        </p:nvPicPr>
+        <p:blipFill>
+          <a:blip r:embed="rId2">
+            <a:extLst>
+              <a:ext uri="{28A0092B-C50C-407E-A947-70E740481C1C}">
+                <a14:useLocalDpi xmlns:a14="http://schemas.microsoft.com/office/drawing/2010/main" val="0"/>
+              </a:ext>
+            </a:extLst>
+          </a:blip>
+          <a:srcRect/>
+          <a:stretch>
+            <a:fillRect/>
+          </a:stretch>
+        </p:blipFill>
+        <p:spPr bwMode="auto">
+          <a:xfrm>
+            <a:off x="2411760" y="2276872"/>
+            <a:ext cx="5112568" cy="3507222"/>
+          </a:xfrm>
+          <a:prstGeom prst="rect">
+            <a:avLst/>
+          </a:prstGeom>
+          <a:noFill/>
+          <a:extLst>
+            <a:ext uri="{909E8E84-426E-40DD-AFC4-6F175D3DCCD1}">
+              <a14:hiddenFill xmlns:a14="http://schemas.microsoft.com/office/drawing/2010/main">
+                <a:solidFill>
+                  <a:srgbClr val="FFFFFF"/>
+                </a:solidFill>
+              </a14:hiddenFill>
+            </a:ext>
+          </a:extLst>
+        </p:spPr>
+      </p:pic>
     </p:spTree>
     <p:extLst>
       <p:ext uri="{BB962C8B-B14F-4D97-AF65-F5344CB8AC3E}">
-        <p14:creationId xmlns:p14="http://schemas.microsoft.com/office/powerpoint/2010/main" val="3479072851"/>
+        <p14:creationId xmlns:p14="http://schemas.microsoft.com/office/powerpoint/2010/main" val="2764069817"/>
       </p:ext>
     </p:extLst>
   </p:cSld>
@@ -4475,13 +5899,7 @@
       </p:grpSpPr>
       <p:sp>
         <p:nvSpPr>
-          <p:cNvPr id="2" name="Titre 1">
-            <a:extLst>
-              <a:ext uri="{FF2B5EF4-FFF2-40B4-BE49-F238E27FC236}">
-                <a16:creationId xmlns:a16="http://schemas.microsoft.com/office/drawing/2014/main" id="{EF6C4528-6434-5246-DFDF-4078515CC9B3}"/>
-              </a:ext>
-            </a:extLst>
-          </p:cNvPr>
+          <p:cNvPr id="2" name="Titre 1"/>
           <p:cNvSpPr>
             <a:spLocks noGrp="1"/>
           </p:cNvSpPr>
@@ -4496,24 +5914,15 @@
           <a:p>
             <a:r>
               <a:rPr lang="fr-FR" dirty="0" err="1"/>
-              <a:t>Retrieval</a:t>
-            </a:r>
-            <a:r>
-              <a:rPr lang="fr-FR" dirty="0"/>
-              <a:t> léger</a:t>
-            </a:r>
+              <a:t>knn</a:t>
+            </a:r>
+            <a:endParaRPr lang="fr-FR" dirty="0"/>
           </a:p>
         </p:txBody>
       </p:sp>
       <p:sp>
         <p:nvSpPr>
-          <p:cNvPr id="3" name="Espace réservé du contenu 2">
-            <a:extLst>
-              <a:ext uri="{FF2B5EF4-FFF2-40B4-BE49-F238E27FC236}">
-                <a16:creationId xmlns:a16="http://schemas.microsoft.com/office/drawing/2014/main" id="{AFA9C0E3-7DD2-4637-5C63-6E31DD6E50E9}"/>
-              </a:ext>
-            </a:extLst>
-          </p:cNvPr>
+          <p:cNvPr id="3" name="Espace réservé du contenu 2"/>
           <p:cNvSpPr>
             <a:spLocks noGrp="1"/>
           </p:cNvSpPr>
@@ -4528,60 +5937,70 @@
           <a:p>
             <a:r>
               <a:rPr lang="fr-FR" dirty="0"/>
-              <a:t>Récupération des </a:t>
-            </a:r>
-            <a:r>
-              <a:rPr lang="fr-FR" dirty="0" err="1"/>
-              <a:t>métadata</a:t>
-            </a:r>
-            <a:endParaRPr lang="fr-FR" dirty="0"/>
+              <a:t>Nous allons regarder la distance avec les k voisins les plus proches</a:t>
+            </a:r>
           </a:p>
           <a:p>
             <a:pPr lvl="1"/>
             <a:r>
               <a:rPr lang="fr-FR" dirty="0"/>
-              <a:t>Récupération du </a:t>
-            </a:r>
-            <a:r>
-              <a:rPr lang="fr-FR" dirty="0" err="1"/>
-              <a:t>chunk</a:t>
-            </a:r>
-            <a:endParaRPr lang="fr-FR" dirty="0"/>
+              <a:t>Ici 5</a:t>
+            </a:r>
           </a:p>
           <a:p>
             <a:pPr lvl="1"/>
             <a:r>
               <a:rPr lang="fr-FR" dirty="0"/>
-              <a:t>Pas de LLM</a:t>
-            </a:r>
-          </a:p>
-          <a:p>
-            <a:r>
-              <a:rPr lang="fr-FR" dirty="0"/>
-              <a:t>Cas d'utilisation</a:t>
-            </a:r>
-          </a:p>
-          <a:p>
-            <a:pPr lvl="1"/>
-            <a:r>
-              <a:rPr lang="fr-FR" dirty="0" err="1"/>
-              <a:t>Chatbot</a:t>
-            </a:r>
-            <a:endParaRPr lang="fr-FR" dirty="0"/>
-          </a:p>
-          <a:p>
-            <a:pPr lvl="1"/>
-            <a:r>
-              <a:rPr lang="fr-FR" dirty="0"/>
-              <a:t>Moteur de recherche</a:t>
+              <a:t>Rouge</a:t>
             </a:r>
           </a:p>
         </p:txBody>
       </p:sp>
+      <p:pic>
+        <p:nvPicPr>
+          <p:cNvPr id="2050" name="Picture 2" descr="les 5 points les plus proches du point que l'on cherche à classer"/>
+          <p:cNvPicPr>
+            <a:picLocks noChangeAspect="1" noChangeArrowheads="1"/>
+          </p:cNvPicPr>
+          <p:nvPr/>
+        </p:nvPicPr>
+        <p:blipFill>
+          <a:blip r:embed="rId2">
+            <a:extLst>
+              <a:ext uri="{28A0092B-C50C-407E-A947-70E740481C1C}">
+                <a14:useLocalDpi xmlns:a14="http://schemas.microsoft.com/office/drawing/2010/main" val="0"/>
+              </a:ext>
+            </a:extLst>
+          </a:blip>
+          <a:srcRect/>
+          <a:stretch>
+            <a:fillRect/>
+          </a:stretch>
+        </p:blipFill>
+        <p:spPr bwMode="auto">
+          <a:xfrm>
+            <a:off x="2483768" y="2564904"/>
+            <a:ext cx="5256584" cy="3606017"/>
+          </a:xfrm>
+          <a:prstGeom prst="rect">
+            <a:avLst/>
+          </a:prstGeom>
+          <a:noFill/>
+          <a:extLst>
+            <a:ext uri="{909E8E84-426E-40DD-AFC4-6F175D3DCCD1}">
+              <a14:hiddenFill xmlns:a14="http://schemas.microsoft.com/office/drawing/2010/main">
+                <a:solidFill>
+                  <a:srgbClr val="FFFFFF"/>
+                </a:solidFill>
+              </a14:hiddenFill>
+            </a:ext>
+          </a:extLst>
+        </p:spPr>
+      </p:pic>
     </p:spTree>
     <p:extLst>
       <p:ext uri="{BB962C8B-B14F-4D97-AF65-F5344CB8AC3E}">
-        <p14:creationId xmlns:p14="http://schemas.microsoft.com/office/powerpoint/2010/main" val="1345439641"/>
+        <p14:creationId xmlns:p14="http://schemas.microsoft.com/office/powerpoint/2010/main" val="3638754126"/>
       </p:ext>
     </p:extLst>
   </p:cSld>
@@ -4610,13 +6029,7 @@
       </p:grpSpPr>
       <p:sp>
         <p:nvSpPr>
-          <p:cNvPr id="2" name="Titre 1">
-            <a:extLst>
-              <a:ext uri="{FF2B5EF4-FFF2-40B4-BE49-F238E27FC236}">
-                <a16:creationId xmlns:a16="http://schemas.microsoft.com/office/drawing/2014/main" id="{1C9C2F40-ACAB-B971-D53F-3C1202E61AA7}"/>
-              </a:ext>
-            </a:extLst>
-          </p:cNvPr>
+          <p:cNvPr id="2" name="Titre 1"/>
           <p:cNvSpPr>
             <a:spLocks noGrp="1"/>
           </p:cNvSpPr>
@@ -4630,25 +6043,15 @@
           <a:lstStyle/>
           <a:p>
             <a:r>
-              <a:rPr lang="fr-FR" dirty="0" err="1"/>
-              <a:t>Retrieval</a:t>
-            </a:r>
-            <a:r>
-              <a:rPr lang="fr-FR" dirty="0"/>
-              <a:t> augmenté</a:t>
+              <a:rPr lang="fr-FR" dirty="0"/>
+              <a:t>Algorithmes</a:t>
             </a:r>
           </a:p>
         </p:txBody>
       </p:sp>
       <p:sp>
         <p:nvSpPr>
-          <p:cNvPr id="3" name="Espace réservé du contenu 2">
-            <a:extLst>
-              <a:ext uri="{FF2B5EF4-FFF2-40B4-BE49-F238E27FC236}">
-                <a16:creationId xmlns:a16="http://schemas.microsoft.com/office/drawing/2014/main" id="{AF82241C-6832-F692-4788-C7F567F3915F}"/>
-              </a:ext>
-            </a:extLst>
-          </p:cNvPr>
+          <p:cNvPr id="3" name="Espace réservé du contenu 2"/>
           <p:cNvSpPr>
             <a:spLocks noGrp="1"/>
           </p:cNvSpPr>
@@ -4662,87 +6065,121 @@
           <a:lstStyle/>
           <a:p>
             <a:r>
-              <a:rPr lang="fr-FR" dirty="0"/>
-              <a:t>Il est possible de retrouver les </a:t>
-            </a:r>
-            <a:r>
-              <a:rPr lang="fr-FR" dirty="0" err="1"/>
-              <a:t>chunks</a:t>
-            </a:r>
-            <a:r>
-              <a:rPr lang="fr-FR" dirty="0"/>
-              <a:t> et de les réinjecter dans le prompt du LLM</a:t>
+              <a:rPr lang="fr-FR" sz="2400" dirty="0"/>
+              <a:t>Il existe plusieurs algorithmes </a:t>
+            </a:r>
+            <a:r>
+              <a:rPr lang="fr-FR" sz="2400" dirty="0" err="1"/>
+              <a:t>knn</a:t>
+            </a:r>
+            <a:endParaRPr lang="fr-FR" sz="2400" dirty="0"/>
+          </a:p>
+          <a:p>
+            <a:r>
+              <a:rPr lang="fr-FR" sz="2400" dirty="0"/>
+              <a:t>Brute Force</a:t>
             </a:r>
           </a:p>
           <a:p>
             <a:pPr lvl="1"/>
             <a:r>
-              <a:rPr lang="fr-FR" dirty="0"/>
-              <a:t>Retour d'une réponse augmentée</a:t>
+              <a:rPr lang="fr-FR" sz="2000" dirty="0"/>
+              <a:t>Etablit la distance entre tous les points</a:t>
             </a:r>
           </a:p>
           <a:p>
             <a:pPr lvl="1"/>
             <a:r>
-              <a:rPr lang="fr-FR" dirty="0"/>
-              <a:t>Dépendant du k de </a:t>
-            </a:r>
-            <a:r>
-              <a:rPr lang="fr-FR" dirty="0" err="1"/>
-              <a:t>kNN</a:t>
-            </a:r>
-            <a:endParaRPr lang="fr-FR" dirty="0"/>
-          </a:p>
-          <a:p>
-            <a:r>
-              <a:rPr lang="fr-FR" dirty="0"/>
-              <a:t>Combien prendre de k (</a:t>
-            </a:r>
-            <a:r>
-              <a:rPr lang="fr-FR" dirty="0" err="1"/>
-              <a:t>knn</a:t>
-            </a:r>
-            <a:r>
-              <a:rPr lang="fr-FR" dirty="0"/>
-              <a:t>)</a:t>
+              <a:rPr lang="fr-FR" sz="2000" dirty="0"/>
+              <a:t>Très bon, mais très couteux pour les gros </a:t>
+            </a:r>
+            <a:r>
+              <a:rPr lang="fr-FR" sz="2000" dirty="0" err="1"/>
+              <a:t>datasets</a:t>
+            </a:r>
+            <a:endParaRPr lang="fr-FR" sz="2000" dirty="0"/>
+          </a:p>
+          <a:p>
+            <a:pPr lvl="1"/>
+            <a:r>
+              <a:rPr lang="fr-FR" sz="2000" dirty="0"/>
+              <a:t>O(n²)</a:t>
+            </a:r>
+          </a:p>
+          <a:p>
+            <a:r>
+              <a:rPr lang="fr-FR" sz="2400" dirty="0" err="1"/>
+              <a:t>KDTree</a:t>
+            </a:r>
+            <a:endParaRPr lang="fr-FR" sz="2400" dirty="0"/>
+          </a:p>
+          <a:p>
+            <a:pPr lvl="1"/>
+            <a:r>
+              <a:rPr lang="fr-FR" sz="2000" dirty="0"/>
+              <a:t>Elimine des distances</a:t>
+            </a:r>
+          </a:p>
+          <a:p>
+            <a:pPr lvl="1"/>
+            <a:r>
+              <a:rPr lang="fr-FR" sz="2000" dirty="0"/>
+              <a:t>Si A est loin de B et B proche de C alors A est loin de C</a:t>
+            </a:r>
+          </a:p>
+          <a:p>
+            <a:pPr lvl="1"/>
+            <a:r>
+              <a:rPr lang="fr-FR" sz="2000" dirty="0"/>
+              <a:t>O(n.log(n))</a:t>
+            </a:r>
+          </a:p>
+          <a:p>
+            <a:r>
+              <a:rPr lang="fr-FR" sz="2400" dirty="0" err="1"/>
+              <a:t>BallTree</a:t>
+            </a:r>
+            <a:endParaRPr lang="fr-FR" sz="2400" dirty="0"/>
+          </a:p>
+          <a:p>
+            <a:pPr lvl="1"/>
+            <a:r>
+              <a:rPr lang="fr-FR" sz="2000" dirty="0"/>
+              <a:t>Sépare les données en partitions</a:t>
+            </a:r>
+          </a:p>
+          <a:p>
+            <a:pPr lvl="1"/>
+            <a:r>
+              <a:rPr lang="fr-FR" sz="2000" dirty="0"/>
+              <a:t>Peut être très efficace ou très </a:t>
+            </a:r>
+            <a:r>
+              <a:rPr lang="fr-FR" sz="2000" dirty="0" err="1"/>
+              <a:t>inneficace</a:t>
+            </a:r>
+            <a:endParaRPr lang="fr-FR" sz="2000" dirty="0"/>
+          </a:p>
+          <a:p>
+            <a:r>
+              <a:rPr lang="fr-FR" sz="2400" dirty="0"/>
+              <a:t>Par défaut </a:t>
+            </a:r>
+            <a:r>
+              <a:rPr lang="fr-FR" sz="2400" dirty="0" err="1"/>
+              <a:t>sklearn</a:t>
+            </a:r>
+            <a:r>
+              <a:rPr lang="fr-FR" sz="2400" dirty="0"/>
+              <a:t> essaie de choisir le meilleur</a:t>
             </a:r>
           </a:p>
         </p:txBody>
       </p:sp>
-      <p:pic>
-        <p:nvPicPr>
-          <p:cNvPr id="7" name="Image 6">
-            <a:extLst>
-              <a:ext uri="{FF2B5EF4-FFF2-40B4-BE49-F238E27FC236}">
-                <a16:creationId xmlns:a16="http://schemas.microsoft.com/office/drawing/2014/main" id="{D790E74C-C14F-98D0-9501-2579DAEA168F}"/>
-              </a:ext>
-            </a:extLst>
-          </p:cNvPr>
-          <p:cNvPicPr>
-            <a:picLocks noChangeAspect="1"/>
-          </p:cNvPicPr>
-          <p:nvPr/>
-        </p:nvPicPr>
-        <p:blipFill>
-          <a:blip r:embed="rId2"/>
-          <a:stretch>
-            <a:fillRect/>
-          </a:stretch>
-        </p:blipFill>
-        <p:spPr>
-          <a:xfrm>
-            <a:off x="6876256" y="2842857"/>
-            <a:ext cx="1933845" cy="3610479"/>
-          </a:xfrm>
-          <a:prstGeom prst="rect">
-            <a:avLst/>
-          </a:prstGeom>
-        </p:spPr>
-      </p:pic>
     </p:spTree>
     <p:extLst>
       <p:ext uri="{BB962C8B-B14F-4D97-AF65-F5344CB8AC3E}">
-        <p14:creationId xmlns:p14="http://schemas.microsoft.com/office/powerpoint/2010/main" val="3868285167"/>
+        <p14:creationId xmlns:p14="http://schemas.microsoft.com/office/powerpoint/2010/main" val="3462804227"/>
       </p:ext>
     </p:extLst>
   </p:cSld>
@@ -4771,13 +6208,7 @@
       </p:grpSpPr>
       <p:sp>
         <p:nvSpPr>
-          <p:cNvPr id="2" name="Titre 1">
-            <a:extLst>
-              <a:ext uri="{FF2B5EF4-FFF2-40B4-BE49-F238E27FC236}">
-                <a16:creationId xmlns:a16="http://schemas.microsoft.com/office/drawing/2014/main" id="{992EFD8E-4F0C-FFFF-6162-D6838C8A6AB1}"/>
-              </a:ext>
-            </a:extLst>
-          </p:cNvPr>
+          <p:cNvPr id="2" name="Titre 1"/>
           <p:cNvSpPr>
             <a:spLocks noGrp="1"/>
           </p:cNvSpPr>
@@ -4792,25 +6223,14 @@
           <a:p>
             <a:r>
               <a:rPr lang="fr-FR" dirty="0"/>
-              <a:t>Injection des </a:t>
-            </a:r>
-            <a:r>
-              <a:rPr lang="fr-FR" dirty="0" err="1"/>
-              <a:t>embeddings</a:t>
-            </a:r>
-            <a:endParaRPr lang="fr-FR" dirty="0"/>
+              <a:t>Modèle</a:t>
+            </a:r>
           </a:p>
         </p:txBody>
       </p:sp>
       <p:sp>
         <p:nvSpPr>
-          <p:cNvPr id="3" name="Espace réservé du contenu 2">
-            <a:extLst>
-              <a:ext uri="{FF2B5EF4-FFF2-40B4-BE49-F238E27FC236}">
-                <a16:creationId xmlns:a16="http://schemas.microsoft.com/office/drawing/2014/main" id="{6CD3A8AA-C390-0049-CA52-388642CBBD5C}"/>
-              </a:ext>
-            </a:extLst>
-          </p:cNvPr>
+          <p:cNvPr id="3" name="Espace réservé du contenu 2"/>
           <p:cNvSpPr>
             <a:spLocks noGrp="1"/>
           </p:cNvSpPr>
@@ -4824,73 +6244,169 @@
           <a:lstStyle/>
           <a:p>
             <a:r>
-              <a:rPr lang="fr-FR" dirty="0"/>
-              <a:t>Les vecteurs sont bien plus légers que le document originel</a:t>
-            </a:r>
-          </a:p>
-          <a:p>
-            <a:pPr lvl="1"/>
-            <a:r>
-              <a:rPr lang="fr-FR" dirty="0"/>
-              <a:t>Plutôt que de réinjecter les </a:t>
-            </a:r>
-            <a:r>
-              <a:rPr lang="fr-FR" dirty="0" err="1"/>
-              <a:t>chunks</a:t>
-            </a:r>
-            <a:r>
-              <a:rPr lang="fr-FR" dirty="0"/>
-              <a:t> dans le prompt il est possible de réinjecter directement les vecteurs</a:t>
-            </a:r>
-          </a:p>
-          <a:p>
-            <a:pPr lvl="1"/>
-            <a:r>
-              <a:rPr lang="fr-FR" dirty="0"/>
-              <a:t>Nécessite d'être </a:t>
-            </a:r>
-            <a:r>
-              <a:rPr lang="fr-FR" dirty="0" err="1"/>
-              <a:t>embedder</a:t>
-            </a:r>
-            <a:r>
-              <a:rPr lang="fr-FR" dirty="0"/>
-              <a:t> avec un modèle compatible</a:t>
-            </a:r>
-          </a:p>
-          <a:p>
-            <a:pPr lvl="1"/>
-            <a:r>
-              <a:rPr lang="fr-FR" dirty="0"/>
-              <a:t>Mistral AI compatible uniquement avec mistral-</a:t>
-            </a:r>
-            <a:r>
-              <a:rPr lang="fr-FR" dirty="0" err="1"/>
-              <a:t>embed</a:t>
-            </a:r>
-            <a:endParaRPr lang="fr-FR" dirty="0"/>
-          </a:p>
-          <a:p>
-            <a:pPr lvl="1"/>
-            <a:r>
-              <a:rPr lang="fr-FR" dirty="0"/>
-              <a:t>Propriétaire à </a:t>
-            </a:r>
-            <a:r>
-              <a:rPr lang="fr-FR"/>
-              <a:t>chaque modèle</a:t>
-            </a:r>
-            <a:endParaRPr lang="fr-FR" dirty="0"/>
-          </a:p>
-          <a:p>
-            <a:endParaRPr lang="fr-FR" dirty="0"/>
+              <a:rPr lang="fr-FR" dirty="0">
+                <a:latin typeface="Courier New" panose="02070309020205020404" pitchFamily="49" charset="0"/>
+                <a:cs typeface="Courier New" panose="02070309020205020404" pitchFamily="49" charset="0"/>
+              </a:rPr>
+              <a:t>import </a:t>
+            </a:r>
+            <a:r>
+              <a:rPr lang="fr-FR" dirty="0" err="1">
+                <a:latin typeface="Courier New" panose="02070309020205020404" pitchFamily="49" charset="0"/>
+                <a:cs typeface="Courier New" panose="02070309020205020404" pitchFamily="49" charset="0"/>
+              </a:rPr>
+              <a:t>sklearn.neighbors</a:t>
+            </a:r>
+            <a:r>
+              <a:rPr lang="fr-FR" dirty="0">
+                <a:latin typeface="Courier New" panose="02070309020205020404" pitchFamily="49" charset="0"/>
+                <a:cs typeface="Courier New" panose="02070309020205020404" pitchFamily="49" charset="0"/>
+              </a:rPr>
+              <a:t> as </a:t>
+            </a:r>
+            <a:r>
+              <a:rPr lang="fr-FR" dirty="0" err="1">
+                <a:latin typeface="Courier New" panose="02070309020205020404" pitchFamily="49" charset="0"/>
+                <a:cs typeface="Courier New" panose="02070309020205020404" pitchFamily="49" charset="0"/>
+              </a:rPr>
+              <a:t>nn</a:t>
+            </a:r>
+            <a:endParaRPr lang="fr-FR" dirty="0">
+              <a:latin typeface="Courier New" panose="02070309020205020404" pitchFamily="49" charset="0"/>
+              <a:cs typeface="Courier New" panose="02070309020205020404" pitchFamily="49" charset="0"/>
+            </a:endParaRPr>
+          </a:p>
+          <a:p>
+            <a:r>
+              <a:rPr lang="fr-FR" dirty="0">
+                <a:latin typeface="Courier New" panose="02070309020205020404" pitchFamily="49" charset="0"/>
+                <a:cs typeface="Courier New" panose="02070309020205020404" pitchFamily="49" charset="0"/>
+              </a:rPr>
+              <a:t>model = </a:t>
+            </a:r>
+            <a:r>
+              <a:rPr lang="fr-FR" dirty="0" err="1">
+                <a:latin typeface="Courier New" panose="02070309020205020404" pitchFamily="49" charset="0"/>
+                <a:cs typeface="Courier New" panose="02070309020205020404" pitchFamily="49" charset="0"/>
+              </a:rPr>
+              <a:t>nn.KNeighborsClassifier</a:t>
+            </a:r>
+            <a:r>
+              <a:rPr lang="fr-FR" dirty="0">
+                <a:latin typeface="Courier New" panose="02070309020205020404" pitchFamily="49" charset="0"/>
+                <a:cs typeface="Courier New" panose="02070309020205020404" pitchFamily="49" charset="0"/>
+              </a:rPr>
+              <a:t>(</a:t>
+            </a:r>
+            <a:r>
+              <a:rPr lang="fr-FR" dirty="0" err="1">
+                <a:latin typeface="Courier New" panose="02070309020205020404" pitchFamily="49" charset="0"/>
+                <a:cs typeface="Courier New" panose="02070309020205020404" pitchFamily="49" charset="0"/>
+              </a:rPr>
+              <a:t>n_neighbors</a:t>
+            </a:r>
+            <a:r>
+              <a:rPr lang="fr-FR" dirty="0">
+                <a:latin typeface="Courier New" panose="02070309020205020404" pitchFamily="49" charset="0"/>
+                <a:cs typeface="Courier New" panose="02070309020205020404" pitchFamily="49" charset="0"/>
+              </a:rPr>
+              <a:t>=3)</a:t>
+            </a:r>
+          </a:p>
+          <a:p>
+            <a:r>
+              <a:rPr lang="fr-FR" dirty="0" err="1">
+                <a:latin typeface="Courier New" panose="02070309020205020404" pitchFamily="49" charset="0"/>
+                <a:cs typeface="Courier New" panose="02070309020205020404" pitchFamily="49" charset="0"/>
+              </a:rPr>
+              <a:t>model.fit</a:t>
+            </a:r>
+            <a:r>
+              <a:rPr lang="fr-FR" dirty="0">
+                <a:latin typeface="Courier New" panose="02070309020205020404" pitchFamily="49" charset="0"/>
+                <a:cs typeface="Courier New" panose="02070309020205020404" pitchFamily="49" charset="0"/>
+              </a:rPr>
+              <a:t>(</a:t>
+            </a:r>
+            <a:r>
+              <a:rPr lang="fr-FR" dirty="0" err="1">
+                <a:latin typeface="Courier New" panose="02070309020205020404" pitchFamily="49" charset="0"/>
+                <a:cs typeface="Courier New" panose="02070309020205020404" pitchFamily="49" charset="0"/>
+              </a:rPr>
+              <a:t>xtrain</a:t>
+            </a:r>
+            <a:r>
+              <a:rPr lang="fr-FR" dirty="0">
+                <a:latin typeface="Courier New" panose="02070309020205020404" pitchFamily="49" charset="0"/>
+                <a:cs typeface="Courier New" panose="02070309020205020404" pitchFamily="49" charset="0"/>
+              </a:rPr>
+              <a:t>, </a:t>
+            </a:r>
+            <a:r>
+              <a:rPr lang="fr-FR" dirty="0" err="1">
+                <a:latin typeface="Courier New" panose="02070309020205020404" pitchFamily="49" charset="0"/>
+                <a:cs typeface="Courier New" panose="02070309020205020404" pitchFamily="49" charset="0"/>
+              </a:rPr>
+              <a:t>ytrain</a:t>
+            </a:r>
+            <a:r>
+              <a:rPr lang="fr-FR" dirty="0">
+                <a:latin typeface="Courier New" panose="02070309020205020404" pitchFamily="49" charset="0"/>
+                <a:cs typeface="Courier New" panose="02070309020205020404" pitchFamily="49" charset="0"/>
+              </a:rPr>
+              <a:t>)</a:t>
+            </a:r>
+          </a:p>
+          <a:p>
+            <a:r>
+              <a:rPr lang="fr-FR" dirty="0" err="1">
+                <a:latin typeface="Courier New" panose="02070309020205020404" pitchFamily="49" charset="0"/>
+                <a:cs typeface="Courier New" panose="02070309020205020404" pitchFamily="49" charset="0"/>
+              </a:rPr>
+              <a:t>model.score</a:t>
+            </a:r>
+            <a:r>
+              <a:rPr lang="fr-FR" dirty="0">
+                <a:latin typeface="Courier New" panose="02070309020205020404" pitchFamily="49" charset="0"/>
+                <a:cs typeface="Courier New" panose="02070309020205020404" pitchFamily="49" charset="0"/>
+              </a:rPr>
+              <a:t>(</a:t>
+            </a:r>
+            <a:r>
+              <a:rPr lang="fr-FR" dirty="0" err="1">
+                <a:latin typeface="Courier New" panose="02070309020205020404" pitchFamily="49" charset="0"/>
+                <a:cs typeface="Courier New" panose="02070309020205020404" pitchFamily="49" charset="0"/>
+              </a:rPr>
+              <a:t>xtest</a:t>
+            </a:r>
+            <a:r>
+              <a:rPr lang="fr-FR" dirty="0">
+                <a:latin typeface="Courier New" panose="02070309020205020404" pitchFamily="49" charset="0"/>
+                <a:cs typeface="Courier New" panose="02070309020205020404" pitchFamily="49" charset="0"/>
+              </a:rPr>
+              <a:t>, </a:t>
+            </a:r>
+            <a:r>
+              <a:rPr lang="fr-FR" dirty="0" err="1">
+                <a:latin typeface="Courier New" panose="02070309020205020404" pitchFamily="49" charset="0"/>
+                <a:cs typeface="Courier New" panose="02070309020205020404" pitchFamily="49" charset="0"/>
+              </a:rPr>
+              <a:t>ytest</a:t>
+            </a:r>
+            <a:r>
+              <a:rPr lang="fr-FR" dirty="0">
+                <a:latin typeface="Courier New" panose="02070309020205020404" pitchFamily="49" charset="0"/>
+                <a:cs typeface="Courier New" panose="02070309020205020404" pitchFamily="49" charset="0"/>
+              </a:rPr>
+              <a:t>)</a:t>
+            </a:r>
           </a:p>
         </p:txBody>
       </p:sp>
     </p:spTree>
     <p:extLst>
       <p:ext uri="{BB962C8B-B14F-4D97-AF65-F5344CB8AC3E}">
-        <p14:creationId xmlns:p14="http://schemas.microsoft.com/office/powerpoint/2010/main" val="1652826858"/>
+        <p14:creationId xmlns:p14="http://schemas.microsoft.com/office/powerpoint/2010/main" val="3171691522"/>
       </p:ext>
     </p:extLst>
   </p:cSld>
